--- a/slides/06-d3.pptx
+++ b/slides/06-d3.pptx
@@ -5,7 +5,7 @@
     <p:sldMasterId id="2147483660" r:id="rId1"/>
   </p:sldMasterIdLst>
   <p:notesMasterIdLst>
-    <p:notesMasterId r:id="rId16"/>
+    <p:notesMasterId r:id="rId18"/>
   </p:notesMasterIdLst>
   <p:sldIdLst>
     <p:sldId id="256" r:id="rId2"/>
@@ -19,9 +19,11 @@
     <p:sldId id="264" r:id="rId10"/>
     <p:sldId id="265" r:id="rId11"/>
     <p:sldId id="269" r:id="rId12"/>
-    <p:sldId id="266" r:id="rId13"/>
-    <p:sldId id="267" r:id="rId14"/>
-    <p:sldId id="268" r:id="rId15"/>
+    <p:sldId id="270" r:id="rId13"/>
+    <p:sldId id="271" r:id="rId14"/>
+    <p:sldId id="266" r:id="rId15"/>
+    <p:sldId id="267" r:id="rId16"/>
+    <p:sldId id="268" r:id="rId17"/>
   </p:sldIdLst>
   <p:sldSz cx="12192000" cy="6858000"/>
   <p:notesSz cx="6858000" cy="9144000"/>
@@ -4594,6 +4596,172 @@
           </a:p>
         </p:txBody>
       </p:sp>
+      <p:sp>
+        <p:nvSpPr>
+          <p:cNvPr id="3" name="Content Placeholder 2">
+            <a:extLst>
+              <a:ext uri="{FF2B5EF4-FFF2-40B4-BE49-F238E27FC236}">
+                <a16:creationId xmlns:a16="http://schemas.microsoft.com/office/drawing/2014/main" id="{8739E2AE-A08B-4A7C-5A74-2B9E15D5824F}"/>
+              </a:ext>
+            </a:extLst>
+          </p:cNvPr>
+          <p:cNvSpPr>
+            <a:spLocks noGrp="1"/>
+          </p:cNvSpPr>
+          <p:nvPr>
+            <p:ph idx="1"/>
+          </p:nvPr>
+        </p:nvSpPr>
+        <p:spPr>
+          <a:xfrm>
+            <a:off x="581192" y="2180496"/>
+            <a:ext cx="11029615" cy="3678303"/>
+          </a:xfrm>
+        </p:spPr>
+        <p:txBody>
+          <a:bodyPr anchor="t">
+            <a:normAutofit/>
+          </a:bodyPr>
+          <a:lstStyle/>
+          <a:p>
+            <a:r>
+              <a:rPr lang="en-US" sz="2400" dirty="0"/>
+              <a:t>Use </a:t>
+            </a:r>
+            <a:r>
+              <a:rPr lang="en-US" sz="2400" dirty="0" err="1">
+                <a:effectLst>
+                  <a:glow rad="228600">
+                    <a:schemeClr val="accent5">
+                      <a:satMod val="175000"/>
+                      <a:alpha val="40000"/>
+                    </a:schemeClr>
+                  </a:glow>
+                </a:effectLst>
+                <a:latin typeface="Consolas" panose="020B0609020204030204" pitchFamily="49" charset="0"/>
+                <a:cs typeface="Consolas" panose="020B0609020204030204" pitchFamily="49" charset="0"/>
+              </a:rPr>
+              <a:t>selectAll</a:t>
+            </a:r>
+            <a:r>
+              <a:rPr lang="en-US" sz="2400" dirty="0">
+                <a:effectLst>
+                  <a:glow rad="228600">
+                    <a:schemeClr val="accent5">
+                      <a:satMod val="175000"/>
+                      <a:alpha val="40000"/>
+                    </a:schemeClr>
+                  </a:glow>
+                </a:effectLst>
+                <a:latin typeface="Consolas" panose="020B0609020204030204" pitchFamily="49" charset="0"/>
+                <a:cs typeface="Consolas" panose="020B0609020204030204" pitchFamily="49" charset="0"/>
+              </a:rPr>
+              <a:t>() </a:t>
+            </a:r>
+            <a:r>
+              <a:rPr lang="en-US" sz="2400" dirty="0"/>
+              <a:t>to select a group of SVGs</a:t>
+            </a:r>
+          </a:p>
+          <a:p>
+            <a:r>
+              <a:rPr lang="en-US" sz="2400" dirty="0">
+                <a:sym typeface="Wingdings" pitchFamily="2" charset="2"/>
+              </a:rPr>
+              <a:t>Specify what to select vis CSS selectors – Ex. </a:t>
+            </a:r>
+            <a:r>
+              <a:rPr lang="en-US" sz="2400" dirty="0" err="1">
+                <a:latin typeface="Consolas" panose="020B0609020204030204" pitchFamily="49" charset="0"/>
+                <a:cs typeface="Consolas" panose="020B0609020204030204" pitchFamily="49" charset="0"/>
+                <a:sym typeface="Wingdings" pitchFamily="2" charset="2"/>
+              </a:rPr>
+              <a:t>selectAll</a:t>
+            </a:r>
+            <a:r>
+              <a:rPr lang="en-US" sz="2400" dirty="0">
+                <a:latin typeface="Consolas" panose="020B0609020204030204" pitchFamily="49" charset="0"/>
+                <a:cs typeface="Consolas" panose="020B0609020204030204" pitchFamily="49" charset="0"/>
+                <a:sym typeface="Wingdings" pitchFamily="2" charset="2"/>
+              </a:rPr>
+              <a:t>(‘circle’)</a:t>
+            </a:r>
+            <a:r>
+              <a:rPr lang="en-US" sz="2400" dirty="0">
+                <a:cs typeface="Consolas" panose="020B0609020204030204" pitchFamily="49" charset="0"/>
+                <a:sym typeface="Wingdings" pitchFamily="2" charset="2"/>
+              </a:rPr>
+              <a:t>, or </a:t>
+            </a:r>
+            <a:r>
+              <a:rPr lang="en-US" sz="2400" dirty="0">
+                <a:sym typeface="Wingdings" pitchFamily="2" charset="2"/>
+              </a:rPr>
+              <a:t> </a:t>
+            </a:r>
+            <a:r>
+              <a:rPr lang="en-US" sz="2400" dirty="0" err="1">
+                <a:latin typeface="Consolas" panose="020B0609020204030204" pitchFamily="49" charset="0"/>
+                <a:cs typeface="Consolas" panose="020B0609020204030204" pitchFamily="49" charset="0"/>
+                <a:sym typeface="Wingdings" pitchFamily="2" charset="2"/>
+              </a:rPr>
+              <a:t>selectAll</a:t>
+            </a:r>
+            <a:r>
+              <a:rPr lang="en-US" sz="2400" dirty="0">
+                <a:latin typeface="Consolas" panose="020B0609020204030204" pitchFamily="49" charset="0"/>
+                <a:cs typeface="Consolas" panose="020B0609020204030204" pitchFamily="49" charset="0"/>
+                <a:sym typeface="Wingdings" pitchFamily="2" charset="2"/>
+              </a:rPr>
+              <a:t>(“.</a:t>
+            </a:r>
+            <a:r>
+              <a:rPr lang="en-US" sz="2400" dirty="0" err="1">
+                <a:latin typeface="Consolas" panose="020B0609020204030204" pitchFamily="49" charset="0"/>
+                <a:cs typeface="Consolas" panose="020B0609020204030204" pitchFamily="49" charset="0"/>
+                <a:sym typeface="Wingdings" pitchFamily="2" charset="2"/>
+              </a:rPr>
+              <a:t>myCircle</a:t>
+            </a:r>
+            <a:r>
+              <a:rPr lang="en-US" sz="2400" dirty="0">
+                <a:latin typeface="Consolas" panose="020B0609020204030204" pitchFamily="49" charset="0"/>
+                <a:cs typeface="Consolas" panose="020B0609020204030204" pitchFamily="49" charset="0"/>
+                <a:sym typeface="Wingdings" pitchFamily="2" charset="2"/>
+              </a:rPr>
+              <a:t>”) </a:t>
+            </a:r>
+            <a:endParaRPr lang="en-US" sz="2400" dirty="0">
+              <a:sym typeface="Wingdings" pitchFamily="2" charset="2"/>
+            </a:endParaRPr>
+          </a:p>
+          <a:p>
+            <a:r>
+              <a:rPr lang="en-US" sz="2400" dirty="0">
+                <a:sym typeface="Wingdings" pitchFamily="2" charset="2"/>
+              </a:rPr>
+              <a:t>Use </a:t>
+            </a:r>
+            <a:r>
+              <a:rPr lang="en-US" sz="2400" dirty="0">
+                <a:latin typeface="Consolas" panose="020B0609020204030204" pitchFamily="49" charset="0"/>
+                <a:cs typeface="Consolas" panose="020B0609020204030204" pitchFamily="49" charset="0"/>
+                <a:sym typeface="Wingdings" pitchFamily="2" charset="2"/>
+              </a:rPr>
+              <a:t>select()</a:t>
+            </a:r>
+            <a:r>
+              <a:rPr lang="en-US" sz="2400" dirty="0">
+                <a:sym typeface="Wingdings" pitchFamily="2" charset="2"/>
+              </a:rPr>
+              <a:t> to select just the first matching element </a:t>
+            </a:r>
+          </a:p>
+          <a:p>
+            <a:endParaRPr lang="en-US" sz="2400" dirty="0"/>
+          </a:p>
+        </p:txBody>
+      </p:sp>
     </p:spTree>
     <p:extLst>
       <p:ext uri="{BB962C8B-B14F-4D97-AF65-F5344CB8AC3E}">
@@ -4608,6 +4776,323 @@
 </file>
 
 <file path=ppt/slides/slide12.xml><?xml version="1.0" encoding="utf-8"?>
+<p:sld xmlns:a="http://schemas.openxmlformats.org/drawingml/2006/main" xmlns:r="http://schemas.openxmlformats.org/officeDocument/2006/relationships" xmlns:p="http://schemas.openxmlformats.org/presentationml/2006/main">
+  <p:cSld>
+    <p:spTree>
+      <p:nvGrpSpPr>
+        <p:cNvPr id="1" name="">
+          <a:extLst>
+            <a:ext uri="{FF2B5EF4-FFF2-40B4-BE49-F238E27FC236}">
+              <a16:creationId xmlns:a16="http://schemas.microsoft.com/office/drawing/2014/main" id="{B9855273-C594-CE31-762A-F392DEE5D8C2}"/>
+            </a:ext>
+          </a:extLst>
+        </p:cNvPr>
+        <p:cNvGrpSpPr/>
+        <p:nvPr/>
+      </p:nvGrpSpPr>
+      <p:grpSpPr>
+        <a:xfrm>
+          <a:off x="0" y="0"/>
+          <a:ext cx="0" cy="0"/>
+          <a:chOff x="0" y="0"/>
+          <a:chExt cx="0" cy="0"/>
+        </a:xfrm>
+      </p:grpSpPr>
+      <p:sp>
+        <p:nvSpPr>
+          <p:cNvPr id="2" name="Title 1">
+            <a:extLst>
+              <a:ext uri="{FF2B5EF4-FFF2-40B4-BE49-F238E27FC236}">
+                <a16:creationId xmlns:a16="http://schemas.microsoft.com/office/drawing/2014/main" id="{4ED9F59E-FD54-C916-DE72-6B77BF144FDD}"/>
+              </a:ext>
+            </a:extLst>
+          </p:cNvPr>
+          <p:cNvSpPr>
+            <a:spLocks noGrp="1"/>
+          </p:cNvSpPr>
+          <p:nvPr>
+            <p:ph type="title"/>
+          </p:nvPr>
+        </p:nvSpPr>
+        <p:spPr/>
+        <p:txBody>
+          <a:bodyPr/>
+          <a:lstStyle/>
+          <a:p>
+            <a:r>
+              <a:rPr lang="en-US" dirty="0"/>
+              <a:t>D3 Basics: selections</a:t>
+            </a:r>
+          </a:p>
+        </p:txBody>
+      </p:sp>
+      <p:sp>
+        <p:nvSpPr>
+          <p:cNvPr id="6" name="TextBox 5">
+            <a:extLst>
+              <a:ext uri="{FF2B5EF4-FFF2-40B4-BE49-F238E27FC236}">
+                <a16:creationId xmlns:a16="http://schemas.microsoft.com/office/drawing/2014/main" id="{F987A75C-E6C2-FD9E-47C2-B92EC6E64FB7}"/>
+              </a:ext>
+            </a:extLst>
+          </p:cNvPr>
+          <p:cNvSpPr txBox="1"/>
+          <p:nvPr/>
+        </p:nvSpPr>
+        <p:spPr>
+          <a:xfrm>
+            <a:off x="7994074" y="6373091"/>
+            <a:ext cx="4053930" cy="369332"/>
+          </a:xfrm>
+          <a:prstGeom prst="rect">
+            <a:avLst/>
+          </a:prstGeom>
+          <a:noFill/>
+        </p:spPr>
+        <p:txBody>
+          <a:bodyPr wrap="none" rtlCol="0">
+            <a:spAutoFit/>
+          </a:bodyPr>
+          <a:lstStyle/>
+          <a:p>
+            <a:r>
+              <a:rPr lang="en-US" dirty="0"/>
+              <a:t>https://www.d3indepth.com/introduction/</a:t>
+            </a:r>
+          </a:p>
+        </p:txBody>
+      </p:sp>
+      <p:sp>
+        <p:nvSpPr>
+          <p:cNvPr id="3" name="Content Placeholder 2">
+            <a:extLst>
+              <a:ext uri="{FF2B5EF4-FFF2-40B4-BE49-F238E27FC236}">
+                <a16:creationId xmlns:a16="http://schemas.microsoft.com/office/drawing/2014/main" id="{83D8F111-845D-E718-DA98-0F8FA4E49F68}"/>
+              </a:ext>
+            </a:extLst>
+          </p:cNvPr>
+          <p:cNvSpPr>
+            <a:spLocks noGrp="1"/>
+          </p:cNvSpPr>
+          <p:nvPr>
+            <p:ph idx="1"/>
+          </p:nvPr>
+        </p:nvSpPr>
+        <p:spPr>
+          <a:xfrm>
+            <a:off x="581192" y="2180496"/>
+            <a:ext cx="11029615" cy="3678303"/>
+          </a:xfrm>
+        </p:spPr>
+        <p:txBody>
+          <a:bodyPr anchor="t">
+            <a:normAutofit/>
+          </a:bodyPr>
+          <a:lstStyle/>
+          <a:p>
+            <a:r>
+              <a:rPr lang="en-US" sz="2400" dirty="0"/>
+              <a:t>After selecting elements, use D3 methods to modify them </a:t>
+            </a:r>
+          </a:p>
+        </p:txBody>
+      </p:sp>
+      <p:pic>
+        <p:nvPicPr>
+          <p:cNvPr id="5" name="Picture 4" descr="A screenshot of a computer program&#10;&#10;AI-generated content may be incorrect.">
+            <a:extLst>
+              <a:ext uri="{FF2B5EF4-FFF2-40B4-BE49-F238E27FC236}">
+                <a16:creationId xmlns:a16="http://schemas.microsoft.com/office/drawing/2014/main" id="{770C7D43-02F9-522E-7AFA-D54693A25216}"/>
+              </a:ext>
+            </a:extLst>
+          </p:cNvPr>
+          <p:cNvPicPr>
+            <a:picLocks noChangeAspect="1"/>
+          </p:cNvPicPr>
+          <p:nvPr/>
+        </p:nvPicPr>
+        <p:blipFill>
+          <a:blip r:embed="rId2"/>
+          <a:stretch>
+            <a:fillRect/>
+          </a:stretch>
+        </p:blipFill>
+        <p:spPr>
+          <a:xfrm>
+            <a:off x="2209799" y="2636557"/>
+            <a:ext cx="7772400" cy="3686782"/>
+          </a:xfrm>
+          <a:prstGeom prst="rect">
+            <a:avLst/>
+          </a:prstGeom>
+        </p:spPr>
+      </p:pic>
+    </p:spTree>
+    <p:extLst>
+      <p:ext uri="{BB962C8B-B14F-4D97-AF65-F5344CB8AC3E}">
+        <p14:creationId xmlns:p14="http://schemas.microsoft.com/office/powerpoint/2010/main" val="1237871165"/>
+      </p:ext>
+    </p:extLst>
+  </p:cSld>
+  <p:clrMapOvr>
+    <a:masterClrMapping/>
+  </p:clrMapOvr>
+</p:sld>
+</file>
+
+<file path=ppt/slides/slide13.xml><?xml version="1.0" encoding="utf-8"?>
+<p:sld xmlns:a="http://schemas.openxmlformats.org/drawingml/2006/main" xmlns:r="http://schemas.openxmlformats.org/officeDocument/2006/relationships" xmlns:p="http://schemas.openxmlformats.org/presentationml/2006/main">
+  <p:cSld>
+    <p:spTree>
+      <p:nvGrpSpPr>
+        <p:cNvPr id="1" name="">
+          <a:extLst>
+            <a:ext uri="{FF2B5EF4-FFF2-40B4-BE49-F238E27FC236}">
+              <a16:creationId xmlns:a16="http://schemas.microsoft.com/office/drawing/2014/main" id="{3D819A5A-C6E7-0C4D-B454-3EA2D325FC24}"/>
+            </a:ext>
+          </a:extLst>
+        </p:cNvPr>
+        <p:cNvGrpSpPr/>
+        <p:nvPr/>
+      </p:nvGrpSpPr>
+      <p:grpSpPr>
+        <a:xfrm>
+          <a:off x="0" y="0"/>
+          <a:ext cx="0" cy="0"/>
+          <a:chOff x="0" y="0"/>
+          <a:chExt cx="0" cy="0"/>
+        </a:xfrm>
+      </p:grpSpPr>
+      <p:sp>
+        <p:nvSpPr>
+          <p:cNvPr id="2" name="Title 1">
+            <a:extLst>
+              <a:ext uri="{FF2B5EF4-FFF2-40B4-BE49-F238E27FC236}">
+                <a16:creationId xmlns:a16="http://schemas.microsoft.com/office/drawing/2014/main" id="{555BA9D8-140A-2279-3932-44633BE66699}"/>
+              </a:ext>
+            </a:extLst>
+          </p:cNvPr>
+          <p:cNvSpPr>
+            <a:spLocks noGrp="1"/>
+          </p:cNvSpPr>
+          <p:nvPr>
+            <p:ph type="title"/>
+          </p:nvPr>
+        </p:nvSpPr>
+        <p:spPr/>
+        <p:txBody>
+          <a:bodyPr/>
+          <a:lstStyle/>
+          <a:p>
+            <a:r>
+              <a:rPr lang="en-US" dirty="0"/>
+              <a:t>D3 Basics: selections</a:t>
+            </a:r>
+          </a:p>
+        </p:txBody>
+      </p:sp>
+      <p:sp>
+        <p:nvSpPr>
+          <p:cNvPr id="6" name="TextBox 5">
+            <a:extLst>
+              <a:ext uri="{FF2B5EF4-FFF2-40B4-BE49-F238E27FC236}">
+                <a16:creationId xmlns:a16="http://schemas.microsoft.com/office/drawing/2014/main" id="{7D29933F-26E3-8A0F-C2F0-FE9A1105BDDA}"/>
+              </a:ext>
+            </a:extLst>
+          </p:cNvPr>
+          <p:cNvSpPr txBox="1"/>
+          <p:nvPr/>
+        </p:nvSpPr>
+        <p:spPr>
+          <a:xfrm>
+            <a:off x="7994074" y="6373091"/>
+            <a:ext cx="4053930" cy="369332"/>
+          </a:xfrm>
+          <a:prstGeom prst="rect">
+            <a:avLst/>
+          </a:prstGeom>
+          <a:noFill/>
+        </p:spPr>
+        <p:txBody>
+          <a:bodyPr wrap="none" rtlCol="0">
+            <a:spAutoFit/>
+          </a:bodyPr>
+          <a:lstStyle/>
+          <a:p>
+            <a:r>
+              <a:rPr lang="en-US" dirty="0"/>
+              <a:t>https://www.d3indepth.com/introduction/</a:t>
+            </a:r>
+          </a:p>
+        </p:txBody>
+      </p:sp>
+      <p:sp>
+        <p:nvSpPr>
+          <p:cNvPr id="3" name="Content Placeholder 2">
+            <a:extLst>
+              <a:ext uri="{FF2B5EF4-FFF2-40B4-BE49-F238E27FC236}">
+                <a16:creationId xmlns:a16="http://schemas.microsoft.com/office/drawing/2014/main" id="{2EBA4DE5-DDC3-8053-D609-689243E18DA6}"/>
+              </a:ext>
+            </a:extLst>
+          </p:cNvPr>
+          <p:cNvSpPr>
+            <a:spLocks noGrp="1"/>
+          </p:cNvSpPr>
+          <p:nvPr>
+            <p:ph idx="1"/>
+          </p:nvPr>
+        </p:nvSpPr>
+        <p:spPr>
+          <a:xfrm>
+            <a:off x="581192" y="2180496"/>
+            <a:ext cx="11029615" cy="3678303"/>
+          </a:xfrm>
+        </p:spPr>
+        <p:txBody>
+          <a:bodyPr anchor="t">
+            <a:normAutofit/>
+          </a:bodyPr>
+          <a:lstStyle/>
+          <a:p>
+            <a:r>
+              <a:rPr lang="en-US" sz="2400" dirty="0"/>
+              <a:t>Your turn: </a:t>
+            </a:r>
+          </a:p>
+          <a:p>
+            <a:pPr lvl="1"/>
+            <a:r>
+              <a:rPr lang="en-US" sz="2200" dirty="0"/>
+              <a:t>Use D3 selections to select all circles in the starter code and assign them the class ‘selected’</a:t>
+            </a:r>
+          </a:p>
+          <a:p>
+            <a:pPr lvl="1"/>
+            <a:r>
+              <a:rPr lang="en-US" sz="2200" dirty="0"/>
+              <a:t>Use CSS to style selected elements such that they are light green with a dark </a:t>
+            </a:r>
+            <a:r>
+              <a:rPr lang="en-US" sz="2200"/>
+              <a:t>green border</a:t>
+            </a:r>
+            <a:endParaRPr lang="en-US" sz="2200" dirty="0"/>
+          </a:p>
+        </p:txBody>
+      </p:sp>
+    </p:spTree>
+    <p:extLst>
+      <p:ext uri="{BB962C8B-B14F-4D97-AF65-F5344CB8AC3E}">
+        <p14:creationId xmlns:p14="http://schemas.microsoft.com/office/powerpoint/2010/main" val="2970143369"/>
+      </p:ext>
+    </p:extLst>
+  </p:cSld>
+  <p:clrMapOvr>
+    <a:masterClrMapping/>
+  </p:clrMapOvr>
+</p:sld>
+</file>
+
+<file path=ppt/slides/slide14.xml><?xml version="1.0" encoding="utf-8"?>
 <p:sld xmlns:a="http://schemas.openxmlformats.org/drawingml/2006/main" xmlns:r="http://schemas.openxmlformats.org/officeDocument/2006/relationships" xmlns:p="http://schemas.openxmlformats.org/presentationml/2006/main">
   <p:cSld>
     <p:spTree>
@@ -4706,7 +5191,7 @@
 </p:sld>
 </file>
 
-<file path=ppt/slides/slide13.xml><?xml version="1.0" encoding="utf-8"?>
+<file path=ppt/slides/slide15.xml><?xml version="1.0" encoding="utf-8"?>
 <p:sld xmlns:a="http://schemas.openxmlformats.org/drawingml/2006/main" xmlns:r="http://schemas.openxmlformats.org/officeDocument/2006/relationships" xmlns:p="http://schemas.openxmlformats.org/presentationml/2006/main">
   <p:cSld>
     <p:spTree>
@@ -4805,7 +5290,7 @@
 </p:sld>
 </file>
 
-<file path=ppt/slides/slide14.xml><?xml version="1.0" encoding="utf-8"?>
+<file path=ppt/slides/slide16.xml><?xml version="1.0" encoding="utf-8"?>
 <p:sld xmlns:a="http://schemas.openxmlformats.org/drawingml/2006/main" xmlns:r="http://schemas.openxmlformats.org/officeDocument/2006/relationships" xmlns:p="http://schemas.openxmlformats.org/presentationml/2006/main">
   <p:cSld>
     <p:spTree>

--- a/slides/06-d3.pptx
+++ b/slides/06-d3.pptx
@@ -5,7 +5,7 @@
     <p:sldMasterId id="2147483660" r:id="rId1"/>
   </p:sldMasterIdLst>
   <p:notesMasterIdLst>
-    <p:notesMasterId r:id="rId18"/>
+    <p:notesMasterId r:id="rId26"/>
   </p:notesMasterIdLst>
   <p:sldIdLst>
     <p:sldId id="256" r:id="rId2"/>
@@ -22,8 +22,16 @@
     <p:sldId id="270" r:id="rId13"/>
     <p:sldId id="271" r:id="rId14"/>
     <p:sldId id="266" r:id="rId15"/>
-    <p:sldId id="267" r:id="rId16"/>
-    <p:sldId id="268" r:id="rId17"/>
+    <p:sldId id="272" r:id="rId16"/>
+    <p:sldId id="273" r:id="rId17"/>
+    <p:sldId id="274" r:id="rId18"/>
+    <p:sldId id="275" r:id="rId19"/>
+    <p:sldId id="268" r:id="rId20"/>
+    <p:sldId id="276" r:id="rId21"/>
+    <p:sldId id="280" r:id="rId22"/>
+    <p:sldId id="278" r:id="rId23"/>
+    <p:sldId id="279" r:id="rId24"/>
+    <p:sldId id="277" r:id="rId25"/>
   </p:sldIdLst>
   <p:sldSz cx="12192000" cy="6858000"/>
   <p:notesSz cx="6858000" cy="9144000"/>
@@ -212,7 +220,7 @@
           <a:p>
             <a:fld id="{2CD22518-F7FE-2E40-9C60-793856882CE6}" type="datetimeFigureOut">
               <a:rPr lang="en-US" smtClean="0"/>
-              <a:t>1/7/26</a:t>
+              <a:t>1/12/26</a:t>
             </a:fld>
             <a:endParaRPr lang="en-US"/>
           </a:p>
@@ -732,7 +740,7 @@
             <a:fld id="{B61BEF0D-F0BB-DE4B-95CE-6DB70DBA9567}" type="datetimeFigureOut">
               <a:rPr lang="en-US" smtClean="0"/>
               <a:pPr/>
-              <a:t>1/7/26</a:t>
+              <a:t>1/12/26</a:t>
             </a:fld>
             <a:endParaRPr lang="en-US" dirty="0"/>
           </a:p>
@@ -996,7 +1004,7 @@
             <a:fld id="{B61BEF0D-F0BB-DE4B-95CE-6DB70DBA9567}" type="datetimeFigureOut">
               <a:rPr lang="en-US" smtClean="0"/>
               <a:pPr/>
-              <a:t>1/7/26</a:t>
+              <a:t>1/12/26</a:t>
             </a:fld>
             <a:endParaRPr lang="en-US" dirty="0"/>
           </a:p>
@@ -1233,7 +1241,7 @@
             <a:fld id="{B61BEF0D-F0BB-DE4B-95CE-6DB70DBA9567}" type="datetimeFigureOut">
               <a:rPr lang="en-US" smtClean="0"/>
               <a:pPr/>
-              <a:t>1/7/26</a:t>
+              <a:t>1/12/26</a:t>
             </a:fld>
             <a:endParaRPr lang="en-US" dirty="0"/>
           </a:p>
@@ -1482,7 +1490,7 @@
             <a:fld id="{B61BEF0D-F0BB-DE4B-95CE-6DB70DBA9567}" type="datetimeFigureOut">
               <a:rPr lang="en-US" smtClean="0"/>
               <a:pPr/>
-              <a:t>1/7/26</a:t>
+              <a:t>1/12/26</a:t>
             </a:fld>
             <a:endParaRPr lang="en-US" dirty="0"/>
           </a:p>
@@ -1791,7 +1799,7 @@
             <a:fld id="{B61BEF0D-F0BB-DE4B-95CE-6DB70DBA9567}" type="datetimeFigureOut">
               <a:rPr lang="en-US" smtClean="0"/>
               <a:pPr/>
-              <a:t>1/7/26</a:t>
+              <a:t>1/12/26</a:t>
             </a:fld>
             <a:endParaRPr lang="en-US" dirty="0"/>
           </a:p>
@@ -2095,7 +2103,7 @@
             <a:fld id="{B61BEF0D-F0BB-DE4B-95CE-6DB70DBA9567}" type="datetimeFigureOut">
               <a:rPr lang="en-US" smtClean="0"/>
               <a:pPr/>
-              <a:t>1/7/26</a:t>
+              <a:t>1/12/26</a:t>
             </a:fld>
             <a:endParaRPr lang="en-US" dirty="0"/>
           </a:p>
@@ -2519,7 +2527,7 @@
             <a:fld id="{B61BEF0D-F0BB-DE4B-95CE-6DB70DBA9567}" type="datetimeFigureOut">
               <a:rPr lang="en-US" smtClean="0"/>
               <a:pPr/>
-              <a:t>1/7/26</a:t>
+              <a:t>1/12/26</a:t>
             </a:fld>
             <a:endParaRPr lang="en-US" dirty="0"/>
           </a:p>
@@ -2616,7 +2624,7 @@
             <a:fld id="{B61BEF0D-F0BB-DE4B-95CE-6DB70DBA9567}" type="datetimeFigureOut">
               <a:rPr lang="en-US" smtClean="0"/>
               <a:pPr/>
-              <a:t>1/7/26</a:t>
+              <a:t>1/12/26</a:t>
             </a:fld>
             <a:endParaRPr lang="en-US" dirty="0"/>
           </a:p>
@@ -2780,7 +2788,7 @@
             <a:fld id="{B61BEF0D-F0BB-DE4B-95CE-6DB70DBA9567}" type="datetimeFigureOut">
               <a:rPr lang="en-US" smtClean="0"/>
               <a:pPr/>
-              <a:t>1/7/26</a:t>
+              <a:t>1/12/26</a:t>
             </a:fld>
             <a:endParaRPr lang="en-US" dirty="0"/>
           </a:p>
@@ -3160,7 +3168,7 @@
             <a:fld id="{B61BEF0D-F0BB-DE4B-95CE-6DB70DBA9567}" type="datetimeFigureOut">
               <a:rPr lang="en-US" smtClean="0"/>
               <a:pPr/>
-              <a:t>1/7/26</a:t>
+              <a:t>1/12/26</a:t>
             </a:fld>
             <a:endParaRPr lang="en-US" dirty="0"/>
           </a:p>
@@ -3451,7 +3459,7 @@
             <a:fld id="{B61BEF0D-F0BB-DE4B-95CE-6DB70DBA9567}" type="datetimeFigureOut">
               <a:rPr lang="en-US" smtClean="0"/>
               <a:pPr/>
-              <a:t>1/7/26</a:t>
+              <a:t>1/12/26</a:t>
             </a:fld>
             <a:endParaRPr lang="en-US" dirty="0"/>
           </a:p>
@@ -3664,7 +3672,7 @@
             <a:fld id="{B61BEF0D-F0BB-DE4B-95CE-6DB70DBA9567}" type="datetimeFigureOut">
               <a:rPr lang="en-US" smtClean="0"/>
               <a:pPr/>
-              <a:t>1/7/26</a:t>
+              <a:t>1/12/26</a:t>
             </a:fld>
             <a:endParaRPr lang="en-US" dirty="0"/>
           </a:p>
@@ -4489,11 +4497,207 @@
               <a:rPr lang="en-US" sz="2400" dirty="0">
                 <a:sym typeface="Wingdings" pitchFamily="2" charset="2"/>
               </a:rPr>
-              <a:t>Final code also on the website </a:t>
+              <a:t>Final code also on the website</a:t>
+            </a:r>
+          </a:p>
+          <a:p>
+            <a:r>
+              <a:rPr lang="en-US" sz="2400" dirty="0">
+                <a:sym typeface="Wingdings" pitchFamily="2" charset="2"/>
+              </a:rPr>
+              <a:t>d3.js is a code library</a:t>
+            </a:r>
+          </a:p>
+          <a:p>
+            <a:r>
+              <a:rPr lang="en-US" sz="2400" dirty="0">
+                <a:sym typeface="Wingdings" pitchFamily="2" charset="2"/>
+              </a:rPr>
+              <a:t>To use the library, include d3.js in your html with the &lt;script&gt; tags  </a:t>
             </a:r>
           </a:p>
           <a:p>
             <a:endParaRPr lang="en-US" sz="2400" dirty="0"/>
+          </a:p>
+        </p:txBody>
+      </p:sp>
+      <p:pic>
+        <p:nvPicPr>
+          <p:cNvPr id="5" name="Picture 4" descr="A screenshot of a computer program&#10;&#10;AI-generated content may be incorrect.">
+            <a:extLst>
+              <a:ext uri="{FF2B5EF4-FFF2-40B4-BE49-F238E27FC236}">
+                <a16:creationId xmlns:a16="http://schemas.microsoft.com/office/drawing/2014/main" id="{558ADC10-91BE-3033-3821-1744749745AF}"/>
+              </a:ext>
+            </a:extLst>
+          </p:cNvPr>
+          <p:cNvPicPr>
+            <a:picLocks noChangeAspect="1"/>
+          </p:cNvPicPr>
+          <p:nvPr/>
+        </p:nvPicPr>
+        <p:blipFill>
+          <a:blip r:embed="rId2"/>
+          <a:stretch>
+            <a:fillRect/>
+          </a:stretch>
+        </p:blipFill>
+        <p:spPr>
+          <a:xfrm>
+            <a:off x="819728" y="4291323"/>
+            <a:ext cx="4927600" cy="2451100"/>
+          </a:xfrm>
+          <a:prstGeom prst="rect">
+            <a:avLst/>
+          </a:prstGeom>
+        </p:spPr>
+      </p:pic>
+      <p:pic>
+        <p:nvPicPr>
+          <p:cNvPr id="8" name="Picture 7" descr="A screenshot of a computer&#10;&#10;AI-generated content may be incorrect.">
+            <a:extLst>
+              <a:ext uri="{FF2B5EF4-FFF2-40B4-BE49-F238E27FC236}">
+                <a16:creationId xmlns:a16="http://schemas.microsoft.com/office/drawing/2014/main" id="{FA398FD3-FF6A-EB2E-2782-E7354C1AB218}"/>
+              </a:ext>
+            </a:extLst>
+          </p:cNvPr>
+          <p:cNvPicPr>
+            <a:picLocks noChangeAspect="1"/>
+          </p:cNvPicPr>
+          <p:nvPr/>
+        </p:nvPicPr>
+        <p:blipFill>
+          <a:blip r:embed="rId3"/>
+          <a:stretch>
+            <a:fillRect/>
+          </a:stretch>
+        </p:blipFill>
+        <p:spPr>
+          <a:xfrm>
+            <a:off x="6263409" y="4365144"/>
+            <a:ext cx="2768600" cy="1790700"/>
+          </a:xfrm>
+          <a:prstGeom prst="rect">
+            <a:avLst/>
+          </a:prstGeom>
+        </p:spPr>
+      </p:pic>
+      <p:sp>
+        <p:nvSpPr>
+          <p:cNvPr id="9" name="Rounded Rectangle 8">
+            <a:extLst>
+              <a:ext uri="{FF2B5EF4-FFF2-40B4-BE49-F238E27FC236}">
+                <a16:creationId xmlns:a16="http://schemas.microsoft.com/office/drawing/2014/main" id="{29417D86-2440-1C4A-AF6A-ED404019D990}"/>
+              </a:ext>
+            </a:extLst>
+          </p:cNvPr>
+          <p:cNvSpPr/>
+          <p:nvPr/>
+        </p:nvSpPr>
+        <p:spPr>
+          <a:xfrm>
+            <a:off x="1745675" y="5860473"/>
+            <a:ext cx="3491344" cy="221673"/>
+          </a:xfrm>
+          <a:prstGeom prst="roundRect">
+            <a:avLst/>
+          </a:prstGeom>
+          <a:noFill/>
+          <a:ln w="38100">
+            <a:solidFill>
+              <a:srgbClr val="FFC000"/>
+            </a:solidFill>
+          </a:ln>
+          <a:effectLst>
+            <a:glow rad="101600">
+              <a:schemeClr val="accent5">
+                <a:satMod val="175000"/>
+                <a:alpha val="40000"/>
+              </a:schemeClr>
+            </a:glow>
+          </a:effectLst>
+        </p:spPr>
+        <p:style>
+          <a:lnRef idx="2">
+            <a:schemeClr val="accent1">
+              <a:shade val="15000"/>
+            </a:schemeClr>
+          </a:lnRef>
+          <a:fillRef idx="1">
+            <a:schemeClr val="accent1"/>
+          </a:fillRef>
+          <a:effectRef idx="0">
+            <a:schemeClr val="accent1"/>
+          </a:effectRef>
+          <a:fontRef idx="minor">
+            <a:schemeClr val="lt1"/>
+          </a:fontRef>
+        </p:style>
+        <p:txBody>
+          <a:bodyPr rtlCol="0" anchor="ctr"/>
+          <a:lstStyle/>
+          <a:p>
+            <a:pPr algn="ctr"/>
+            <a:endParaRPr lang="en-US"/>
+          </a:p>
+        </p:txBody>
+      </p:sp>
+      <p:sp>
+        <p:nvSpPr>
+          <p:cNvPr id="10" name="Rounded Rectangle 9">
+            <a:extLst>
+              <a:ext uri="{FF2B5EF4-FFF2-40B4-BE49-F238E27FC236}">
+                <a16:creationId xmlns:a16="http://schemas.microsoft.com/office/drawing/2014/main" id="{798BFE31-4430-BC99-44FE-2920E3DD0B15}"/>
+              </a:ext>
+            </a:extLst>
+          </p:cNvPr>
+          <p:cNvSpPr/>
+          <p:nvPr/>
+        </p:nvSpPr>
+        <p:spPr>
+          <a:xfrm>
+            <a:off x="6428513" y="4821382"/>
+            <a:ext cx="1565561" cy="290945"/>
+          </a:xfrm>
+          <a:prstGeom prst="roundRect">
+            <a:avLst/>
+          </a:prstGeom>
+          <a:noFill/>
+          <a:ln w="38100">
+            <a:solidFill>
+              <a:srgbClr val="FFC000"/>
+            </a:solidFill>
+          </a:ln>
+          <a:effectLst>
+            <a:glow rad="101600">
+              <a:schemeClr val="accent5">
+                <a:satMod val="175000"/>
+                <a:alpha val="40000"/>
+              </a:schemeClr>
+            </a:glow>
+          </a:effectLst>
+        </p:spPr>
+        <p:style>
+          <a:lnRef idx="2">
+            <a:schemeClr val="accent1">
+              <a:shade val="15000"/>
+            </a:schemeClr>
+          </a:lnRef>
+          <a:fillRef idx="1">
+            <a:schemeClr val="accent1"/>
+          </a:fillRef>
+          <a:effectRef idx="0">
+            <a:schemeClr val="accent1"/>
+          </a:effectRef>
+          <a:fontRef idx="minor">
+            <a:schemeClr val="lt1"/>
+          </a:fontRef>
+        </p:style>
+        <p:txBody>
+          <a:bodyPr rtlCol="0" anchor="ctr"/>
+          <a:lstStyle/>
+          <a:p>
+            <a:pPr algn="ctr"/>
+            <a:endParaRPr lang="en-US"/>
           </a:p>
         </p:txBody>
       </p:sp>
@@ -5043,8 +5247,8 @@
         </p:nvSpPr>
         <p:spPr>
           <a:xfrm>
-            <a:off x="581192" y="2180496"/>
-            <a:ext cx="11029615" cy="3678303"/>
+            <a:off x="581192" y="1911928"/>
+            <a:ext cx="11029615" cy="3946872"/>
           </a:xfrm>
         </p:spPr>
         <p:txBody>
@@ -5069,13 +5273,114 @@
             <a:pPr lvl="1"/>
             <a:r>
               <a:rPr lang="en-US" sz="2200" dirty="0"/>
-              <a:t>Use CSS to style selected elements such that they are light green with a dark </a:t>
-            </a:r>
-            <a:r>
-              <a:rPr lang="en-US" sz="2200"/>
-              <a:t>green border</a:t>
-            </a:r>
-            <a:endParaRPr lang="en-US" sz="2200" dirty="0"/>
+              <a:t>Use CSS to style selected elements such that they are light green with a dark green border</a:t>
+            </a:r>
+          </a:p>
+        </p:txBody>
+      </p:sp>
+      <p:pic>
+        <p:nvPicPr>
+          <p:cNvPr id="5" name="Picture 4" descr="A screenshot of a computer&#10;&#10;AI-generated content may be incorrect.">
+            <a:extLst>
+              <a:ext uri="{FF2B5EF4-FFF2-40B4-BE49-F238E27FC236}">
+                <a16:creationId xmlns:a16="http://schemas.microsoft.com/office/drawing/2014/main" id="{EDDB3DAD-7DD6-8359-0FB9-80D890B1DF60}"/>
+              </a:ext>
+            </a:extLst>
+          </p:cNvPr>
+          <p:cNvPicPr>
+            <a:picLocks noChangeAspect="1"/>
+          </p:cNvPicPr>
+          <p:nvPr/>
+        </p:nvPicPr>
+        <p:blipFill>
+          <a:blip r:embed="rId2"/>
+          <a:stretch>
+            <a:fillRect/>
+          </a:stretch>
+        </p:blipFill>
+        <p:spPr>
+          <a:xfrm>
+            <a:off x="1264653" y="3882015"/>
+            <a:ext cx="4594259" cy="2675742"/>
+          </a:xfrm>
+          <a:prstGeom prst="rect">
+            <a:avLst/>
+          </a:prstGeom>
+        </p:spPr>
+      </p:pic>
+      <p:pic>
+        <p:nvPicPr>
+          <p:cNvPr id="8" name="Picture 7" descr="A screenshot of a computer&#10;&#10;AI-generated content may be incorrect.">
+            <a:extLst>
+              <a:ext uri="{FF2B5EF4-FFF2-40B4-BE49-F238E27FC236}">
+                <a16:creationId xmlns:a16="http://schemas.microsoft.com/office/drawing/2014/main" id="{21A636BD-E49A-4E76-4257-A6BAF9EFF275}"/>
+              </a:ext>
+            </a:extLst>
+          </p:cNvPr>
+          <p:cNvPicPr>
+            <a:picLocks noChangeAspect="1"/>
+          </p:cNvPicPr>
+          <p:nvPr/>
+        </p:nvPicPr>
+        <p:blipFill>
+          <a:blip r:embed="rId3"/>
+          <a:stretch>
+            <a:fillRect/>
+          </a:stretch>
+        </p:blipFill>
+        <p:spPr>
+          <a:xfrm>
+            <a:off x="6476216" y="3882015"/>
+            <a:ext cx="4594259" cy="2675742"/>
+          </a:xfrm>
+          <a:prstGeom prst="rect">
+            <a:avLst/>
+          </a:prstGeom>
+        </p:spPr>
+      </p:pic>
+      <p:sp>
+        <p:nvSpPr>
+          <p:cNvPr id="9" name="Right Arrow 8">
+            <a:extLst>
+              <a:ext uri="{FF2B5EF4-FFF2-40B4-BE49-F238E27FC236}">
+                <a16:creationId xmlns:a16="http://schemas.microsoft.com/office/drawing/2014/main" id="{F893FB9A-FB6A-354D-FDBF-A384909A0A0C}"/>
+              </a:ext>
+            </a:extLst>
+          </p:cNvPr>
+          <p:cNvSpPr/>
+          <p:nvPr/>
+        </p:nvSpPr>
+        <p:spPr>
+          <a:xfrm>
+            <a:off x="5195455" y="5195455"/>
+            <a:ext cx="1496290" cy="346363"/>
+          </a:xfrm>
+          <a:prstGeom prst="rightArrow">
+            <a:avLst/>
+          </a:prstGeom>
+        </p:spPr>
+        <p:style>
+          <a:lnRef idx="2">
+            <a:schemeClr val="accent1">
+              <a:shade val="15000"/>
+            </a:schemeClr>
+          </a:lnRef>
+          <a:fillRef idx="1">
+            <a:schemeClr val="accent1"/>
+          </a:fillRef>
+          <a:effectRef idx="0">
+            <a:schemeClr val="accent1"/>
+          </a:effectRef>
+          <a:fontRef idx="minor">
+            <a:schemeClr val="lt1"/>
+          </a:fontRef>
+        </p:style>
+        <p:txBody>
+          <a:bodyPr rtlCol="0" anchor="ctr"/>
+          <a:lstStyle/>
+          <a:p>
+            <a:pPr algn="ctr"/>
+            <a:endParaRPr lang="en-US"/>
           </a:p>
         </p:txBody>
       </p:sp>
@@ -5178,6 +5483,65 @@
           </a:p>
         </p:txBody>
       </p:sp>
+      <p:sp>
+        <p:nvSpPr>
+          <p:cNvPr id="3" name="Content Placeholder 2">
+            <a:extLst>
+              <a:ext uri="{FF2B5EF4-FFF2-40B4-BE49-F238E27FC236}">
+                <a16:creationId xmlns:a16="http://schemas.microsoft.com/office/drawing/2014/main" id="{7D310B15-9C9C-42BE-AB44-683341C2881B}"/>
+              </a:ext>
+            </a:extLst>
+          </p:cNvPr>
+          <p:cNvSpPr>
+            <a:spLocks noGrp="1"/>
+          </p:cNvSpPr>
+          <p:nvPr>
+            <p:ph idx="1"/>
+          </p:nvPr>
+        </p:nvSpPr>
+        <p:spPr>
+          <a:xfrm>
+            <a:off x="581192" y="1911928"/>
+            <a:ext cx="11029615" cy="3946872"/>
+          </a:xfrm>
+        </p:spPr>
+        <p:txBody>
+          <a:bodyPr anchor="t">
+            <a:normAutofit/>
+          </a:bodyPr>
+          <a:lstStyle/>
+          <a:p>
+            <a:r>
+              <a:rPr lang="en-US" sz="2400" dirty="0"/>
+              <a:t>A data join creates a correspondence between an array of data and a selection of HTML or SVG elements.</a:t>
+            </a:r>
+          </a:p>
+          <a:p>
+            <a:r>
+              <a:rPr lang="en-US" sz="2400" dirty="0"/>
+              <a:t>Joining an array to HTML/SVG elements means that:</a:t>
+            </a:r>
+          </a:p>
+          <a:p>
+            <a:pPr lvl="1"/>
+            <a:r>
+              <a:rPr lang="en-US" sz="2200" dirty="0"/>
+              <a:t>HTML (or SVG) elements are added or removed such that </a:t>
+            </a:r>
+            <a:r>
+              <a:rPr lang="en-US" sz="2200" b="1" dirty="0"/>
+              <a:t>each array element has a corresponding HTML (or SVG) element</a:t>
+            </a:r>
+          </a:p>
+          <a:p>
+            <a:pPr lvl="1"/>
+            <a:r>
+              <a:rPr lang="en-US" sz="2200" dirty="0"/>
+              <a:t>each HTML/SVG element may be positioned, sized and styled according to the value of its corresponding array element</a:t>
+            </a:r>
+          </a:p>
+        </p:txBody>
+      </p:sp>
     </p:spTree>
     <p:extLst>
       <p:ext uri="{BB962C8B-B14F-4D97-AF65-F5344CB8AC3E}">
@@ -5199,7 +5563,7 @@
         <p:cNvPr id="1" name="">
           <a:extLst>
             <a:ext uri="{FF2B5EF4-FFF2-40B4-BE49-F238E27FC236}">
-              <a16:creationId xmlns:a16="http://schemas.microsoft.com/office/drawing/2014/main" id="{0554A7A1-6231-99B3-0FDA-F11786067C8E}"/>
+              <a16:creationId xmlns:a16="http://schemas.microsoft.com/office/drawing/2014/main" id="{680FB694-2EA9-82F3-2717-CBE2B95BC02B}"/>
             </a:ext>
           </a:extLst>
         </p:cNvPr>
@@ -5214,12 +5578,42 @@
           <a:chExt cx="0" cy="0"/>
         </a:xfrm>
       </p:grpSpPr>
+      <p:pic>
+        <p:nvPicPr>
+          <p:cNvPr id="16" name="Picture 15" descr="A screen shot of a computer program&#10;&#10;AI-generated content may be incorrect.">
+            <a:extLst>
+              <a:ext uri="{FF2B5EF4-FFF2-40B4-BE49-F238E27FC236}">
+                <a16:creationId xmlns:a16="http://schemas.microsoft.com/office/drawing/2014/main" id="{2335F3FB-416F-5671-79E5-3034152A7EEF}"/>
+              </a:ext>
+            </a:extLst>
+          </p:cNvPr>
+          <p:cNvPicPr>
+            <a:picLocks noChangeAspect="1"/>
+          </p:cNvPicPr>
+          <p:nvPr/>
+        </p:nvPicPr>
+        <p:blipFill>
+          <a:blip r:embed="rId2"/>
+          <a:stretch>
+            <a:fillRect/>
+          </a:stretch>
+        </p:blipFill>
+        <p:spPr>
+          <a:xfrm>
+            <a:off x="5507966" y="3311108"/>
+            <a:ext cx="4432300" cy="4597400"/>
+          </a:xfrm>
+          <a:prstGeom prst="rect">
+            <a:avLst/>
+          </a:prstGeom>
+        </p:spPr>
+      </p:pic>
       <p:sp>
         <p:nvSpPr>
           <p:cNvPr id="2" name="Title 1">
             <a:extLst>
               <a:ext uri="{FF2B5EF4-FFF2-40B4-BE49-F238E27FC236}">
-                <a16:creationId xmlns:a16="http://schemas.microsoft.com/office/drawing/2014/main" id="{AC542136-8567-2B31-EE15-F4DD19AC7337}"/>
+                <a16:creationId xmlns:a16="http://schemas.microsoft.com/office/drawing/2014/main" id="{68EB49D7-7E1B-4C59-E484-60AEEA38ADB7}"/>
               </a:ext>
             </a:extLst>
           </p:cNvPr>
@@ -5237,7 +5631,7 @@
           <a:p>
             <a:r>
               <a:rPr lang="en-US" dirty="0"/>
-              <a:t>D3 Basics: enter, exit, update</a:t>
+              <a:t>D3 Basics: data Joins</a:t>
             </a:r>
           </a:p>
         </p:txBody>
@@ -5247,7 +5641,7 @@
           <p:cNvPr id="6" name="TextBox 5">
             <a:extLst>
               <a:ext uri="{FF2B5EF4-FFF2-40B4-BE49-F238E27FC236}">
-                <a16:creationId xmlns:a16="http://schemas.microsoft.com/office/drawing/2014/main" id="{DEEDD1D8-6041-226D-28AB-4FCE5B3748C0}"/>
+                <a16:creationId xmlns:a16="http://schemas.microsoft.com/office/drawing/2014/main" id="{DC5F000B-B0AD-19EF-E812-8AB1D5B1D165}"/>
               </a:ext>
             </a:extLst>
           </p:cNvPr>
@@ -5256,8 +5650,8 @@
         </p:nvSpPr>
         <p:spPr>
           <a:xfrm>
-            <a:off x="7994074" y="6373091"/>
-            <a:ext cx="4053930" cy="369332"/>
+            <a:off x="10009541" y="6036489"/>
+            <a:ext cx="2107737" cy="646331"/>
           </a:xfrm>
           <a:prstGeom prst="rect">
             <a:avLst/>
@@ -5265,7 +5659,7 @@
           <a:noFill/>
         </p:spPr>
         <p:txBody>
-          <a:bodyPr wrap="none" rtlCol="0">
+          <a:bodyPr wrap="square" rtlCol="0">
             <a:spAutoFit/>
           </a:bodyPr>
           <a:lstStyle/>
@@ -5277,10 +5671,223 @@
           </a:p>
         </p:txBody>
       </p:sp>
+      <p:sp>
+        <p:nvSpPr>
+          <p:cNvPr id="3" name="Content Placeholder 2">
+            <a:extLst>
+              <a:ext uri="{FF2B5EF4-FFF2-40B4-BE49-F238E27FC236}">
+                <a16:creationId xmlns:a16="http://schemas.microsoft.com/office/drawing/2014/main" id="{F8BA0D4B-2303-55EC-370D-53134E3C2EBC}"/>
+              </a:ext>
+            </a:extLst>
+          </p:cNvPr>
+          <p:cNvSpPr>
+            <a:spLocks noGrp="1"/>
+          </p:cNvSpPr>
+          <p:nvPr>
+            <p:ph idx="1"/>
+          </p:nvPr>
+        </p:nvSpPr>
+        <p:spPr>
+          <a:xfrm>
+            <a:off x="581193" y="1911927"/>
+            <a:ext cx="4926773" cy="4558145"/>
+          </a:xfrm>
+        </p:spPr>
+        <p:txBody>
+          <a:bodyPr anchor="t">
+            <a:normAutofit fontScale="92500" lnSpcReduction="10000"/>
+          </a:bodyPr>
+          <a:lstStyle/>
+          <a:p>
+            <a:r>
+              <a:rPr lang="en-US" sz="2400" dirty="0"/>
+              <a:t>Typically, four methods are used in a data join:</a:t>
+            </a:r>
+          </a:p>
+          <a:p>
+            <a:pPr lvl="1"/>
+            <a:r>
+              <a:rPr lang="en-US" sz="2200" dirty="0">
+                <a:effectLst>
+                  <a:glow rad="228600">
+                    <a:schemeClr val="accent5">
+                      <a:satMod val="175000"/>
+                      <a:alpha val="40000"/>
+                    </a:schemeClr>
+                  </a:glow>
+                </a:effectLst>
+                <a:latin typeface="Consolas" panose="020B0609020204030204" pitchFamily="49" charset="0"/>
+                <a:cs typeface="Consolas" panose="020B0609020204030204" pitchFamily="49" charset="0"/>
+              </a:rPr>
+              <a:t>.select </a:t>
+            </a:r>
+            <a:r>
+              <a:rPr lang="en-US" sz="2200" dirty="0"/>
+              <a:t>defines the element that'll act as a container (or parent) to the joined HTML/SVG elements</a:t>
+            </a:r>
+          </a:p>
+          <a:p>
+            <a:pPr lvl="1"/>
+            <a:r>
+              <a:rPr lang="en-US" sz="2200" dirty="0">
+                <a:effectLst>
+                  <a:glow rad="228600">
+                    <a:schemeClr val="accent5">
+                      <a:satMod val="175000"/>
+                      <a:alpha val="40000"/>
+                    </a:schemeClr>
+                  </a:glow>
+                </a:effectLst>
+                <a:latin typeface="Consolas" panose="020B0609020204030204" pitchFamily="49" charset="0"/>
+                <a:cs typeface="Consolas" panose="020B0609020204030204" pitchFamily="49" charset="0"/>
+              </a:rPr>
+              <a:t>.</a:t>
+            </a:r>
+            <a:r>
+              <a:rPr lang="en-US" sz="2200" dirty="0" err="1">
+                <a:effectLst>
+                  <a:glow rad="228600">
+                    <a:schemeClr val="accent5">
+                      <a:satMod val="175000"/>
+                      <a:alpha val="40000"/>
+                    </a:schemeClr>
+                  </a:glow>
+                </a:effectLst>
+                <a:latin typeface="Consolas" panose="020B0609020204030204" pitchFamily="49" charset="0"/>
+                <a:cs typeface="Consolas" panose="020B0609020204030204" pitchFamily="49" charset="0"/>
+              </a:rPr>
+              <a:t>selectAll</a:t>
+            </a:r>
+            <a:r>
+              <a:rPr lang="en-US" sz="2200" dirty="0">
+                <a:effectLst>
+                  <a:glow rad="228600">
+                    <a:schemeClr val="accent5">
+                      <a:satMod val="175000"/>
+                      <a:alpha val="40000"/>
+                    </a:schemeClr>
+                  </a:glow>
+                </a:effectLst>
+                <a:latin typeface="Consolas" panose="020B0609020204030204" pitchFamily="49" charset="0"/>
+                <a:cs typeface="Consolas" panose="020B0609020204030204" pitchFamily="49" charset="0"/>
+              </a:rPr>
+              <a:t> </a:t>
+            </a:r>
+            <a:r>
+              <a:rPr lang="en-US" sz="2200" dirty="0"/>
+              <a:t>defines the type of element that'll be joined to each array element</a:t>
+            </a:r>
+          </a:p>
+          <a:p>
+            <a:pPr lvl="1"/>
+            <a:r>
+              <a:rPr lang="en-US" sz="2200" dirty="0">
+                <a:effectLst>
+                  <a:glow rad="228600">
+                    <a:schemeClr val="accent5">
+                      <a:satMod val="175000"/>
+                      <a:alpha val="40000"/>
+                    </a:schemeClr>
+                  </a:glow>
+                </a:effectLst>
+                <a:latin typeface="Consolas" panose="020B0609020204030204" pitchFamily="49" charset="0"/>
+                <a:cs typeface="Consolas" panose="020B0609020204030204" pitchFamily="49" charset="0"/>
+              </a:rPr>
+              <a:t>.data </a:t>
+            </a:r>
+            <a:r>
+              <a:rPr lang="en-US" sz="2200" dirty="0"/>
+              <a:t>defines the array that's being joined</a:t>
+            </a:r>
+          </a:p>
+          <a:p>
+            <a:pPr lvl="1"/>
+            <a:r>
+              <a:rPr lang="en-US" sz="2200" dirty="0">
+                <a:effectLst>
+                  <a:glow rad="228600">
+                    <a:schemeClr val="accent5">
+                      <a:satMod val="175000"/>
+                      <a:alpha val="40000"/>
+                    </a:schemeClr>
+                  </a:glow>
+                </a:effectLst>
+                <a:latin typeface="Consolas" panose="020B0609020204030204" pitchFamily="49" charset="0"/>
+                <a:cs typeface="Consolas" panose="020B0609020204030204" pitchFamily="49" charset="0"/>
+              </a:rPr>
+              <a:t>.join </a:t>
+            </a:r>
+            <a:r>
+              <a:rPr lang="en-US" sz="2200" dirty="0"/>
+              <a:t>performs the join. This is where HTML or SVG elements are added and removed</a:t>
+            </a:r>
+          </a:p>
+        </p:txBody>
+      </p:sp>
+      <p:pic>
+        <p:nvPicPr>
+          <p:cNvPr id="14" name="Picture 13" descr="A computer code with colorful text&#10;&#10;AI-generated content may be incorrect.">
+            <a:extLst>
+              <a:ext uri="{FF2B5EF4-FFF2-40B4-BE49-F238E27FC236}">
+                <a16:creationId xmlns:a16="http://schemas.microsoft.com/office/drawing/2014/main" id="{6EC91F80-3C9F-6849-1536-6C1526071116}"/>
+              </a:ext>
+            </a:extLst>
+          </p:cNvPr>
+          <p:cNvPicPr>
+            <a:picLocks noChangeAspect="1"/>
+          </p:cNvPicPr>
+          <p:nvPr/>
+        </p:nvPicPr>
+        <p:blipFill>
+          <a:blip r:embed="rId3"/>
+          <a:stretch>
+            <a:fillRect/>
+          </a:stretch>
+        </p:blipFill>
+        <p:spPr>
+          <a:xfrm>
+            <a:off x="5507966" y="1715955"/>
+            <a:ext cx="4755424" cy="1151935"/>
+          </a:xfrm>
+          <a:prstGeom prst="rect">
+            <a:avLst/>
+          </a:prstGeom>
+        </p:spPr>
+      </p:pic>
+      <p:pic>
+        <p:nvPicPr>
+          <p:cNvPr id="10" name="Picture 9" descr="A screen shot of a computer code&#10;&#10;AI-generated content may be incorrect.">
+            <a:extLst>
+              <a:ext uri="{FF2B5EF4-FFF2-40B4-BE49-F238E27FC236}">
+                <a16:creationId xmlns:a16="http://schemas.microsoft.com/office/drawing/2014/main" id="{E53F4830-8FC4-8CD8-572F-8F3D090ECEE0}"/>
+              </a:ext>
+            </a:extLst>
+          </p:cNvPr>
+          <p:cNvPicPr>
+            <a:picLocks noChangeAspect="1"/>
+          </p:cNvPicPr>
+          <p:nvPr/>
+        </p:nvPicPr>
+        <p:blipFill>
+          <a:blip r:embed="rId4"/>
+          <a:stretch>
+            <a:fillRect/>
+          </a:stretch>
+        </p:blipFill>
+        <p:spPr>
+          <a:xfrm>
+            <a:off x="8566127" y="2514962"/>
+            <a:ext cx="4591680" cy="2295840"/>
+          </a:xfrm>
+          <a:prstGeom prst="rect">
+            <a:avLst/>
+          </a:prstGeom>
+        </p:spPr>
+      </p:pic>
     </p:spTree>
     <p:extLst>
       <p:ext uri="{BB962C8B-B14F-4D97-AF65-F5344CB8AC3E}">
-        <p14:creationId xmlns:p14="http://schemas.microsoft.com/office/powerpoint/2010/main" val="2818736152"/>
+        <p14:creationId xmlns:p14="http://schemas.microsoft.com/office/powerpoint/2010/main" val="1440669356"/>
       </p:ext>
     </p:extLst>
   </p:cSld>
@@ -5291,6 +5898,633 @@
 </file>
 
 <file path=ppt/slides/slide16.xml><?xml version="1.0" encoding="utf-8"?>
+<p:sld xmlns:a="http://schemas.openxmlformats.org/drawingml/2006/main" xmlns:r="http://schemas.openxmlformats.org/officeDocument/2006/relationships" xmlns:p="http://schemas.openxmlformats.org/presentationml/2006/main">
+  <p:cSld>
+    <p:spTree>
+      <p:nvGrpSpPr>
+        <p:cNvPr id="1" name="">
+          <a:extLst>
+            <a:ext uri="{FF2B5EF4-FFF2-40B4-BE49-F238E27FC236}">
+              <a16:creationId xmlns:a16="http://schemas.microsoft.com/office/drawing/2014/main" id="{44355A1C-2FBC-0819-4D3E-16B800F0DCFA}"/>
+            </a:ext>
+          </a:extLst>
+        </p:cNvPr>
+        <p:cNvGrpSpPr/>
+        <p:nvPr/>
+      </p:nvGrpSpPr>
+      <p:grpSpPr>
+        <a:xfrm>
+          <a:off x="0" y="0"/>
+          <a:ext cx="0" cy="0"/>
+          <a:chOff x="0" y="0"/>
+          <a:chExt cx="0" cy="0"/>
+        </a:xfrm>
+      </p:grpSpPr>
+      <p:sp>
+        <p:nvSpPr>
+          <p:cNvPr id="2" name="Title 1">
+            <a:extLst>
+              <a:ext uri="{FF2B5EF4-FFF2-40B4-BE49-F238E27FC236}">
+                <a16:creationId xmlns:a16="http://schemas.microsoft.com/office/drawing/2014/main" id="{DB74AA8C-8EA8-1662-4C1C-CF28DBEAD62D}"/>
+              </a:ext>
+            </a:extLst>
+          </p:cNvPr>
+          <p:cNvSpPr>
+            <a:spLocks noGrp="1"/>
+          </p:cNvSpPr>
+          <p:nvPr>
+            <p:ph type="title"/>
+          </p:nvPr>
+        </p:nvSpPr>
+        <p:spPr/>
+        <p:txBody>
+          <a:bodyPr/>
+          <a:lstStyle/>
+          <a:p>
+            <a:r>
+              <a:rPr lang="en-US" dirty="0"/>
+              <a:t>D3 Basics: data Joins</a:t>
+            </a:r>
+          </a:p>
+        </p:txBody>
+      </p:sp>
+      <p:sp>
+        <p:nvSpPr>
+          <p:cNvPr id="6" name="TextBox 5">
+            <a:extLst>
+              <a:ext uri="{FF2B5EF4-FFF2-40B4-BE49-F238E27FC236}">
+                <a16:creationId xmlns:a16="http://schemas.microsoft.com/office/drawing/2014/main" id="{DA0E292C-51D2-15E3-8702-EC3A08E62656}"/>
+              </a:ext>
+            </a:extLst>
+          </p:cNvPr>
+          <p:cNvSpPr txBox="1"/>
+          <p:nvPr/>
+        </p:nvSpPr>
+        <p:spPr>
+          <a:xfrm>
+            <a:off x="7680870" y="6483750"/>
+            <a:ext cx="4511130" cy="369332"/>
+          </a:xfrm>
+          <a:prstGeom prst="rect">
+            <a:avLst/>
+          </a:prstGeom>
+          <a:noFill/>
+        </p:spPr>
+        <p:txBody>
+          <a:bodyPr wrap="square" rtlCol="0">
+            <a:spAutoFit/>
+          </a:bodyPr>
+          <a:lstStyle/>
+          <a:p>
+            <a:r>
+              <a:rPr lang="en-US" dirty="0"/>
+              <a:t>https://www.d3indepth.com/introduction/</a:t>
+            </a:r>
+          </a:p>
+        </p:txBody>
+      </p:sp>
+      <p:sp>
+        <p:nvSpPr>
+          <p:cNvPr id="3" name="Content Placeholder 2">
+            <a:extLst>
+              <a:ext uri="{FF2B5EF4-FFF2-40B4-BE49-F238E27FC236}">
+                <a16:creationId xmlns:a16="http://schemas.microsoft.com/office/drawing/2014/main" id="{22E9681F-AD04-C294-4203-5F1A32DB48BC}"/>
+              </a:ext>
+            </a:extLst>
+          </p:cNvPr>
+          <p:cNvSpPr>
+            <a:spLocks noGrp="1"/>
+          </p:cNvSpPr>
+          <p:nvPr>
+            <p:ph idx="1"/>
+          </p:nvPr>
+        </p:nvSpPr>
+        <p:spPr>
+          <a:xfrm>
+            <a:off x="581193" y="1911927"/>
+            <a:ext cx="10931934" cy="4558145"/>
+          </a:xfrm>
+        </p:spPr>
+        <p:txBody>
+          <a:bodyPr anchor="t">
+            <a:normAutofit/>
+          </a:bodyPr>
+          <a:lstStyle/>
+          <a:p>
+            <a:r>
+              <a:rPr lang="en-US" sz="2400" dirty="0"/>
+              <a:t>Once data and HTML/SVG elements are joined, we can use the data to dynamically set properties of the elements  </a:t>
+            </a:r>
+            <a:endParaRPr lang="en-US" sz="2200" dirty="0"/>
+          </a:p>
+        </p:txBody>
+      </p:sp>
+      <p:pic>
+        <p:nvPicPr>
+          <p:cNvPr id="9" name="Picture 8" descr="A screenshot of a computer&#10;&#10;AI-generated content may be incorrect.">
+            <a:extLst>
+              <a:ext uri="{FF2B5EF4-FFF2-40B4-BE49-F238E27FC236}">
+                <a16:creationId xmlns:a16="http://schemas.microsoft.com/office/drawing/2014/main" id="{E17DBCB1-C785-0A38-3EFD-22F59B68CE20}"/>
+              </a:ext>
+            </a:extLst>
+          </p:cNvPr>
+          <p:cNvPicPr>
+            <a:picLocks noChangeAspect="1"/>
+          </p:cNvPicPr>
+          <p:nvPr/>
+        </p:nvPicPr>
+        <p:blipFill>
+          <a:blip r:embed="rId2"/>
+          <a:stretch>
+            <a:fillRect/>
+          </a:stretch>
+        </p:blipFill>
+        <p:spPr>
+          <a:xfrm>
+            <a:off x="2881031" y="2488899"/>
+            <a:ext cx="9310969" cy="4558145"/>
+          </a:xfrm>
+          <a:prstGeom prst="rect">
+            <a:avLst/>
+          </a:prstGeom>
+        </p:spPr>
+      </p:pic>
+      <p:pic>
+        <p:nvPicPr>
+          <p:cNvPr id="5" name="Picture 4" descr="A screen shot of a computer code&#10;&#10;AI-generated content may be incorrect.">
+            <a:extLst>
+              <a:ext uri="{FF2B5EF4-FFF2-40B4-BE49-F238E27FC236}">
+                <a16:creationId xmlns:a16="http://schemas.microsoft.com/office/drawing/2014/main" id="{00331138-9E1D-00DB-08F4-99009684A5B1}"/>
+              </a:ext>
+            </a:extLst>
+          </p:cNvPr>
+          <p:cNvPicPr>
+            <a:picLocks noChangeAspect="1"/>
+          </p:cNvPicPr>
+          <p:nvPr/>
+        </p:nvPicPr>
+        <p:blipFill>
+          <a:blip r:embed="rId3"/>
+          <a:stretch>
+            <a:fillRect/>
+          </a:stretch>
+        </p:blipFill>
+        <p:spPr>
+          <a:xfrm>
+            <a:off x="678873" y="2795618"/>
+            <a:ext cx="3543300" cy="2794000"/>
+          </a:xfrm>
+          <a:prstGeom prst="rect">
+            <a:avLst/>
+          </a:prstGeom>
+        </p:spPr>
+      </p:pic>
+    </p:spTree>
+    <p:extLst>
+      <p:ext uri="{BB962C8B-B14F-4D97-AF65-F5344CB8AC3E}">
+        <p14:creationId xmlns:p14="http://schemas.microsoft.com/office/powerpoint/2010/main" val="3834540900"/>
+      </p:ext>
+    </p:extLst>
+  </p:cSld>
+  <p:clrMapOvr>
+    <a:masterClrMapping/>
+  </p:clrMapOvr>
+</p:sld>
+</file>
+
+<file path=ppt/slides/slide17.xml><?xml version="1.0" encoding="utf-8"?>
+<p:sld xmlns:a="http://schemas.openxmlformats.org/drawingml/2006/main" xmlns:r="http://schemas.openxmlformats.org/officeDocument/2006/relationships" xmlns:p="http://schemas.openxmlformats.org/presentationml/2006/main">
+  <p:cSld>
+    <p:spTree>
+      <p:nvGrpSpPr>
+        <p:cNvPr id="1" name="">
+          <a:extLst>
+            <a:ext uri="{FF2B5EF4-FFF2-40B4-BE49-F238E27FC236}">
+              <a16:creationId xmlns:a16="http://schemas.microsoft.com/office/drawing/2014/main" id="{B7CE7267-395B-B490-EDFC-1A659ACB55F1}"/>
+            </a:ext>
+          </a:extLst>
+        </p:cNvPr>
+        <p:cNvGrpSpPr/>
+        <p:nvPr/>
+      </p:nvGrpSpPr>
+      <p:grpSpPr>
+        <a:xfrm>
+          <a:off x="0" y="0"/>
+          <a:ext cx="0" cy="0"/>
+          <a:chOff x="0" y="0"/>
+          <a:chExt cx="0" cy="0"/>
+        </a:xfrm>
+      </p:grpSpPr>
+      <p:sp>
+        <p:nvSpPr>
+          <p:cNvPr id="2" name="Title 1">
+            <a:extLst>
+              <a:ext uri="{FF2B5EF4-FFF2-40B4-BE49-F238E27FC236}">
+                <a16:creationId xmlns:a16="http://schemas.microsoft.com/office/drawing/2014/main" id="{EF0021CB-9D00-A207-62F1-45C9941C06E8}"/>
+              </a:ext>
+            </a:extLst>
+          </p:cNvPr>
+          <p:cNvSpPr>
+            <a:spLocks noGrp="1"/>
+          </p:cNvSpPr>
+          <p:nvPr>
+            <p:ph type="title"/>
+          </p:nvPr>
+        </p:nvSpPr>
+        <p:spPr/>
+        <p:txBody>
+          <a:bodyPr/>
+          <a:lstStyle/>
+          <a:p>
+            <a:r>
+              <a:rPr lang="en-US" dirty="0"/>
+              <a:t>D3 Basics: data Joins</a:t>
+            </a:r>
+          </a:p>
+        </p:txBody>
+      </p:sp>
+      <p:sp>
+        <p:nvSpPr>
+          <p:cNvPr id="6" name="TextBox 5">
+            <a:extLst>
+              <a:ext uri="{FF2B5EF4-FFF2-40B4-BE49-F238E27FC236}">
+                <a16:creationId xmlns:a16="http://schemas.microsoft.com/office/drawing/2014/main" id="{3BB60ACA-402E-0E99-3DEC-B169D377C311}"/>
+              </a:ext>
+            </a:extLst>
+          </p:cNvPr>
+          <p:cNvSpPr txBox="1"/>
+          <p:nvPr/>
+        </p:nvSpPr>
+        <p:spPr>
+          <a:xfrm>
+            <a:off x="7680870" y="6483750"/>
+            <a:ext cx="4511130" cy="369332"/>
+          </a:xfrm>
+          <a:prstGeom prst="rect">
+            <a:avLst/>
+          </a:prstGeom>
+          <a:noFill/>
+        </p:spPr>
+        <p:txBody>
+          <a:bodyPr wrap="square" rtlCol="0">
+            <a:spAutoFit/>
+          </a:bodyPr>
+          <a:lstStyle/>
+          <a:p>
+            <a:r>
+              <a:rPr lang="en-US" dirty="0"/>
+              <a:t>https://www.d3indepth.com/introduction/</a:t>
+            </a:r>
+          </a:p>
+        </p:txBody>
+      </p:sp>
+      <p:sp>
+        <p:nvSpPr>
+          <p:cNvPr id="3" name="Content Placeholder 2">
+            <a:extLst>
+              <a:ext uri="{FF2B5EF4-FFF2-40B4-BE49-F238E27FC236}">
+                <a16:creationId xmlns:a16="http://schemas.microsoft.com/office/drawing/2014/main" id="{49E2E736-102D-1996-A245-8DAC85823F7D}"/>
+              </a:ext>
+            </a:extLst>
+          </p:cNvPr>
+          <p:cNvSpPr>
+            <a:spLocks noGrp="1"/>
+          </p:cNvSpPr>
+          <p:nvPr>
+            <p:ph idx="1"/>
+          </p:nvPr>
+        </p:nvSpPr>
+        <p:spPr>
+          <a:xfrm>
+            <a:off x="581193" y="1911927"/>
+            <a:ext cx="10931934" cy="4558145"/>
+          </a:xfrm>
+        </p:spPr>
+        <p:txBody>
+          <a:bodyPr anchor="t">
+            <a:normAutofit/>
+          </a:bodyPr>
+          <a:lstStyle/>
+          <a:p>
+            <a:r>
+              <a:rPr lang="en-US" sz="2200" dirty="0"/>
+              <a:t>Data will typically be in JSON format</a:t>
+            </a:r>
+          </a:p>
+          <a:p>
+            <a:endParaRPr lang="en-US" sz="2200" dirty="0"/>
+          </a:p>
+          <a:p>
+            <a:endParaRPr lang="en-US" sz="2200" dirty="0"/>
+          </a:p>
+          <a:p>
+            <a:endParaRPr lang="en-US" sz="2200" dirty="0"/>
+          </a:p>
+          <a:p>
+            <a:endParaRPr lang="en-US" sz="2200" dirty="0"/>
+          </a:p>
+          <a:p>
+            <a:r>
+              <a:rPr lang="en-US" sz="2200" dirty="0"/>
+              <a:t>In this format, each observation is an object. Data is accessed as properties of the object</a:t>
+            </a:r>
+          </a:p>
+        </p:txBody>
+      </p:sp>
+      <p:pic>
+        <p:nvPicPr>
+          <p:cNvPr id="7" name="Picture 6" descr="A screen shot of a computer code&#10;&#10;AI-generated content may be incorrect.">
+            <a:extLst>
+              <a:ext uri="{FF2B5EF4-FFF2-40B4-BE49-F238E27FC236}">
+                <a16:creationId xmlns:a16="http://schemas.microsoft.com/office/drawing/2014/main" id="{DCBD2552-BBB1-07F9-677C-CCD18741B3CD}"/>
+              </a:ext>
+            </a:extLst>
+          </p:cNvPr>
+          <p:cNvPicPr>
+            <a:picLocks noChangeAspect="1"/>
+          </p:cNvPicPr>
+          <p:nvPr/>
+        </p:nvPicPr>
+        <p:blipFill>
+          <a:blip r:embed="rId2"/>
+          <a:stretch>
+            <a:fillRect/>
+          </a:stretch>
+        </p:blipFill>
+        <p:spPr>
+          <a:xfrm>
+            <a:off x="1018885" y="2452830"/>
+            <a:ext cx="5541671" cy="1717387"/>
+          </a:xfrm>
+          <a:prstGeom prst="rect">
+            <a:avLst/>
+          </a:prstGeom>
+        </p:spPr>
+      </p:pic>
+      <p:pic>
+        <p:nvPicPr>
+          <p:cNvPr id="10" name="Picture 9" descr="A screen shot of a computer code&#10;&#10;AI-generated content may be incorrect.">
+            <a:extLst>
+              <a:ext uri="{FF2B5EF4-FFF2-40B4-BE49-F238E27FC236}">
+                <a16:creationId xmlns:a16="http://schemas.microsoft.com/office/drawing/2014/main" id="{2DC28EE2-6B3D-39F9-3351-9A20D1233CA8}"/>
+              </a:ext>
+            </a:extLst>
+          </p:cNvPr>
+          <p:cNvPicPr>
+            <a:picLocks noChangeAspect="1"/>
+          </p:cNvPicPr>
+          <p:nvPr/>
+        </p:nvPicPr>
+        <p:blipFill>
+          <a:blip r:embed="rId3"/>
+          <a:stretch>
+            <a:fillRect/>
+          </a:stretch>
+        </p:blipFill>
+        <p:spPr>
+          <a:xfrm>
+            <a:off x="1018885" y="4853708"/>
+            <a:ext cx="5616554" cy="1630041"/>
+          </a:xfrm>
+          <a:prstGeom prst="rect">
+            <a:avLst/>
+          </a:prstGeom>
+        </p:spPr>
+      </p:pic>
+    </p:spTree>
+    <p:extLst>
+      <p:ext uri="{BB962C8B-B14F-4D97-AF65-F5344CB8AC3E}">
+        <p14:creationId xmlns:p14="http://schemas.microsoft.com/office/powerpoint/2010/main" val="1647152031"/>
+      </p:ext>
+    </p:extLst>
+  </p:cSld>
+  <p:clrMapOvr>
+    <a:masterClrMapping/>
+  </p:clrMapOvr>
+</p:sld>
+</file>
+
+<file path=ppt/slides/slide18.xml><?xml version="1.0" encoding="utf-8"?>
+<p:sld xmlns:a="http://schemas.openxmlformats.org/drawingml/2006/main" xmlns:r="http://schemas.openxmlformats.org/officeDocument/2006/relationships" xmlns:p="http://schemas.openxmlformats.org/presentationml/2006/main">
+  <p:cSld>
+    <p:spTree>
+      <p:nvGrpSpPr>
+        <p:cNvPr id="1" name="">
+          <a:extLst>
+            <a:ext uri="{FF2B5EF4-FFF2-40B4-BE49-F238E27FC236}">
+              <a16:creationId xmlns:a16="http://schemas.microsoft.com/office/drawing/2014/main" id="{6E061BB9-01FB-A862-7F7C-3B991D62B089}"/>
+            </a:ext>
+          </a:extLst>
+        </p:cNvPr>
+        <p:cNvGrpSpPr/>
+        <p:nvPr/>
+      </p:nvGrpSpPr>
+      <p:grpSpPr>
+        <a:xfrm>
+          <a:off x="0" y="0"/>
+          <a:ext cx="0" cy="0"/>
+          <a:chOff x="0" y="0"/>
+          <a:chExt cx="0" cy="0"/>
+        </a:xfrm>
+      </p:grpSpPr>
+      <p:sp>
+        <p:nvSpPr>
+          <p:cNvPr id="2" name="Title 1">
+            <a:extLst>
+              <a:ext uri="{FF2B5EF4-FFF2-40B4-BE49-F238E27FC236}">
+                <a16:creationId xmlns:a16="http://schemas.microsoft.com/office/drawing/2014/main" id="{8263E5A2-7A20-CC73-BAD8-7C33FB252A2C}"/>
+              </a:ext>
+            </a:extLst>
+          </p:cNvPr>
+          <p:cNvSpPr>
+            <a:spLocks noGrp="1"/>
+          </p:cNvSpPr>
+          <p:nvPr>
+            <p:ph type="title"/>
+          </p:nvPr>
+        </p:nvSpPr>
+        <p:spPr/>
+        <p:txBody>
+          <a:bodyPr/>
+          <a:lstStyle/>
+          <a:p>
+            <a:r>
+              <a:rPr lang="en-US" dirty="0"/>
+              <a:t>D3 Basics: data Joins</a:t>
+            </a:r>
+          </a:p>
+        </p:txBody>
+      </p:sp>
+      <p:sp>
+        <p:nvSpPr>
+          <p:cNvPr id="6" name="TextBox 5">
+            <a:extLst>
+              <a:ext uri="{FF2B5EF4-FFF2-40B4-BE49-F238E27FC236}">
+                <a16:creationId xmlns:a16="http://schemas.microsoft.com/office/drawing/2014/main" id="{535600EF-6E2F-87F5-2650-1170C80DED4C}"/>
+              </a:ext>
+            </a:extLst>
+          </p:cNvPr>
+          <p:cNvSpPr txBox="1"/>
+          <p:nvPr/>
+        </p:nvSpPr>
+        <p:spPr>
+          <a:xfrm>
+            <a:off x="7680870" y="6483750"/>
+            <a:ext cx="4511130" cy="369332"/>
+          </a:xfrm>
+          <a:prstGeom prst="rect">
+            <a:avLst/>
+          </a:prstGeom>
+          <a:noFill/>
+        </p:spPr>
+        <p:txBody>
+          <a:bodyPr wrap="square" rtlCol="0">
+            <a:spAutoFit/>
+          </a:bodyPr>
+          <a:lstStyle/>
+          <a:p>
+            <a:r>
+              <a:rPr lang="en-US" dirty="0"/>
+              <a:t>https://www.d3indepth.com/introduction/</a:t>
+            </a:r>
+          </a:p>
+        </p:txBody>
+      </p:sp>
+      <p:sp>
+        <p:nvSpPr>
+          <p:cNvPr id="3" name="Content Placeholder 2">
+            <a:extLst>
+              <a:ext uri="{FF2B5EF4-FFF2-40B4-BE49-F238E27FC236}">
+                <a16:creationId xmlns:a16="http://schemas.microsoft.com/office/drawing/2014/main" id="{EF9C0532-1C0B-E2C7-1E99-BBBE9B5FA802}"/>
+              </a:ext>
+            </a:extLst>
+          </p:cNvPr>
+          <p:cNvSpPr>
+            <a:spLocks noGrp="1"/>
+          </p:cNvSpPr>
+          <p:nvPr>
+            <p:ph idx="1"/>
+          </p:nvPr>
+        </p:nvSpPr>
+        <p:spPr>
+          <a:xfrm>
+            <a:off x="581194" y="1911927"/>
+            <a:ext cx="4267898" cy="4558145"/>
+          </a:xfrm>
+        </p:spPr>
+        <p:txBody>
+          <a:bodyPr anchor="t">
+            <a:normAutofit/>
+          </a:bodyPr>
+          <a:lstStyle/>
+          <a:p>
+            <a:r>
+              <a:rPr lang="en-US" sz="2200" dirty="0"/>
+              <a:t>Your turn:</a:t>
+            </a:r>
+          </a:p>
+          <a:p>
+            <a:pPr lvl="1"/>
+            <a:r>
+              <a:rPr lang="en-US" sz="2000" dirty="0"/>
+              <a:t>Add a rectangle for each observation in </a:t>
+            </a:r>
+            <a:r>
+              <a:rPr lang="en-US" sz="2000" dirty="0" err="1">
+                <a:latin typeface="Consolas" panose="020B0609020204030204" pitchFamily="49" charset="0"/>
+                <a:cs typeface="Consolas" panose="020B0609020204030204" pitchFamily="49" charset="0"/>
+              </a:rPr>
+              <a:t>myData</a:t>
+            </a:r>
+            <a:r>
+              <a:rPr lang="en-US" sz="2000" dirty="0"/>
+              <a:t> to your HTML </a:t>
+            </a:r>
+          </a:p>
+          <a:p>
+            <a:pPr lvl="1"/>
+            <a:r>
+              <a:rPr lang="en-US" sz="2000" dirty="0"/>
+              <a:t>Use even horizontal spacing, and map height to price </a:t>
+            </a:r>
+          </a:p>
+        </p:txBody>
+      </p:sp>
+      <p:pic>
+        <p:nvPicPr>
+          <p:cNvPr id="7" name="Picture 6" descr="A screen shot of a computer code&#10;&#10;AI-generated content may be incorrect.">
+            <a:extLst>
+              <a:ext uri="{FF2B5EF4-FFF2-40B4-BE49-F238E27FC236}">
+                <a16:creationId xmlns:a16="http://schemas.microsoft.com/office/drawing/2014/main" id="{EF1ECBB1-CC81-339C-66D1-B3F78DEF939A}"/>
+              </a:ext>
+            </a:extLst>
+          </p:cNvPr>
+          <p:cNvPicPr>
+            <a:picLocks noChangeAspect="1"/>
+          </p:cNvPicPr>
+          <p:nvPr/>
+        </p:nvPicPr>
+        <p:blipFill>
+          <a:blip r:embed="rId2"/>
+          <a:srcRect l="13498"/>
+          <a:stretch>
+            <a:fillRect/>
+          </a:stretch>
+        </p:blipFill>
+        <p:spPr>
+          <a:xfrm>
+            <a:off x="171590" y="4438457"/>
+            <a:ext cx="4793673" cy="1717387"/>
+          </a:xfrm>
+          <a:prstGeom prst="rect">
+            <a:avLst/>
+          </a:prstGeom>
+        </p:spPr>
+      </p:pic>
+      <p:pic>
+        <p:nvPicPr>
+          <p:cNvPr id="9" name="Picture 8" descr="A computer screen shot of a computer screen&#10;&#10;AI-generated content may be incorrect.">
+            <a:extLst>
+              <a:ext uri="{FF2B5EF4-FFF2-40B4-BE49-F238E27FC236}">
+                <a16:creationId xmlns:a16="http://schemas.microsoft.com/office/drawing/2014/main" id="{5D6F580E-A8A4-EEC2-58A0-2FBE84F946EC}"/>
+              </a:ext>
+            </a:extLst>
+          </p:cNvPr>
+          <p:cNvPicPr>
+            <a:picLocks noChangeAspect="1"/>
+          </p:cNvPicPr>
+          <p:nvPr/>
+        </p:nvPicPr>
+        <p:blipFill>
+          <a:blip r:embed="rId3"/>
+          <a:stretch>
+            <a:fillRect/>
+          </a:stretch>
+        </p:blipFill>
+        <p:spPr>
+          <a:xfrm>
+            <a:off x="4611079" y="1546629"/>
+            <a:ext cx="7772400" cy="5311371"/>
+          </a:xfrm>
+          <a:prstGeom prst="rect">
+            <a:avLst/>
+          </a:prstGeom>
+        </p:spPr>
+      </p:pic>
+    </p:spTree>
+    <p:extLst>
+      <p:ext uri="{BB962C8B-B14F-4D97-AF65-F5344CB8AC3E}">
+        <p14:creationId xmlns:p14="http://schemas.microsoft.com/office/powerpoint/2010/main" val="1024478131"/>
+      </p:ext>
+    </p:extLst>
+  </p:cSld>
+  <p:clrMapOvr>
+    <a:masterClrMapping/>
+  </p:clrMapOvr>
+</p:sld>
+</file>
+
+<file path=ppt/slides/slide19.xml><?xml version="1.0" encoding="utf-8"?>
 <p:sld xmlns:a="http://schemas.openxmlformats.org/drawingml/2006/main" xmlns:r="http://schemas.openxmlformats.org/officeDocument/2006/relationships" xmlns:p="http://schemas.openxmlformats.org/presentationml/2006/main">
   <p:cSld>
     <p:spTree>
@@ -5355,8 +6589,8 @@
         </p:nvSpPr>
         <p:spPr>
           <a:xfrm>
-            <a:off x="7994074" y="6373091"/>
-            <a:ext cx="4053930" cy="369332"/>
+            <a:off x="9584459" y="6019712"/>
+            <a:ext cx="2463545" cy="646331"/>
           </a:xfrm>
           <a:prstGeom prst="rect">
             <a:avLst/>
@@ -5364,7 +6598,7 @@
           <a:noFill/>
         </p:spPr>
         <p:txBody>
-          <a:bodyPr wrap="none" rtlCol="0">
+          <a:bodyPr wrap="square" rtlCol="0">
             <a:spAutoFit/>
           </a:bodyPr>
           <a:lstStyle/>
@@ -5376,6 +6610,115 @@
           </a:p>
         </p:txBody>
       </p:sp>
+      <p:sp>
+        <p:nvSpPr>
+          <p:cNvPr id="3" name="Content Placeholder 2">
+            <a:extLst>
+              <a:ext uri="{FF2B5EF4-FFF2-40B4-BE49-F238E27FC236}">
+                <a16:creationId xmlns:a16="http://schemas.microsoft.com/office/drawing/2014/main" id="{ECE711B4-5702-9464-C823-4C7915941DDE}"/>
+              </a:ext>
+            </a:extLst>
+          </p:cNvPr>
+          <p:cNvSpPr>
+            <a:spLocks noGrp="1"/>
+          </p:cNvSpPr>
+          <p:nvPr>
+            <p:ph idx="1"/>
+          </p:nvPr>
+        </p:nvSpPr>
+        <p:spPr>
+          <a:xfrm>
+            <a:off x="581193" y="1911927"/>
+            <a:ext cx="10931934" cy="4558145"/>
+          </a:xfrm>
+        </p:spPr>
+        <p:txBody>
+          <a:bodyPr anchor="t">
+            <a:normAutofit/>
+          </a:bodyPr>
+          <a:lstStyle/>
+          <a:p>
+            <a:r>
+              <a:rPr lang="en-US" sz="2200" dirty="0"/>
+              <a:t>To make perceptually accurate visualizations, we need to map data values to visual channels such as position, color, length, etc.</a:t>
+            </a:r>
+          </a:p>
+          <a:p>
+            <a:r>
+              <a:rPr lang="en-US" sz="2200" dirty="0"/>
+              <a:t>D3 has built in scale methods to make this easier </a:t>
+            </a:r>
+          </a:p>
+          <a:p>
+            <a:r>
+              <a:rPr lang="en-US" sz="2200" dirty="0"/>
+              <a:t>Scale methods:</a:t>
+            </a:r>
+          </a:p>
+          <a:p>
+            <a:pPr lvl="1"/>
+            <a:r>
+              <a:rPr lang="en-US" sz="2200" dirty="0"/>
+              <a:t>take an input (usually a number, date or category) and</a:t>
+            </a:r>
+          </a:p>
+          <a:p>
+            <a:pPr lvl="1"/>
+            <a:r>
+              <a:rPr lang="en-US" sz="2200" dirty="0"/>
+              <a:t>return a value (such as a coordinate, a </a:t>
+            </a:r>
+            <a:r>
+              <a:rPr lang="en-US" sz="2200" dirty="0" err="1"/>
+              <a:t>colour</a:t>
+            </a:r>
+            <a:r>
+              <a:rPr lang="en-US" sz="2200" dirty="0"/>
+              <a:t>, a length or a radius)</a:t>
+            </a:r>
+          </a:p>
+          <a:p>
+            <a:pPr lvl="1"/>
+            <a:r>
+              <a:rPr lang="en-US" sz="2200" dirty="0"/>
+              <a:t>Ex.</a:t>
+            </a:r>
+          </a:p>
+          <a:p>
+            <a:endParaRPr lang="en-US" sz="2200" dirty="0"/>
+          </a:p>
+        </p:txBody>
+      </p:sp>
+      <p:pic>
+        <p:nvPicPr>
+          <p:cNvPr id="5" name="Picture 4" descr="A white rectangular object with black dots&#10;&#10;AI-generated content may be incorrect.">
+            <a:extLst>
+              <a:ext uri="{FF2B5EF4-FFF2-40B4-BE49-F238E27FC236}">
+                <a16:creationId xmlns:a16="http://schemas.microsoft.com/office/drawing/2014/main" id="{340B1C50-5F1A-28B0-E17B-1B0D20F481E9}"/>
+              </a:ext>
+            </a:extLst>
+          </p:cNvPr>
+          <p:cNvPicPr>
+            <a:picLocks noChangeAspect="1"/>
+          </p:cNvPicPr>
+          <p:nvPr/>
+        </p:nvPicPr>
+        <p:blipFill>
+          <a:blip r:embed="rId2"/>
+          <a:stretch>
+            <a:fillRect/>
+          </a:stretch>
+        </p:blipFill>
+        <p:spPr>
+          <a:xfrm>
+            <a:off x="1812059" y="4592611"/>
+            <a:ext cx="7772400" cy="2149812"/>
+          </a:xfrm>
+          <a:prstGeom prst="rect">
+            <a:avLst/>
+          </a:prstGeom>
+        </p:spPr>
+      </p:pic>
     </p:spTree>
     <p:extLst>
       <p:ext uri="{BB962C8B-B14F-4D97-AF65-F5344CB8AC3E}">
@@ -5480,6 +6823,1202 @@
     <p:extLst>
       <p:ext uri="{BB962C8B-B14F-4D97-AF65-F5344CB8AC3E}">
         <p14:creationId xmlns:p14="http://schemas.microsoft.com/office/powerpoint/2010/main" val="2057560901"/>
+      </p:ext>
+    </p:extLst>
+  </p:cSld>
+  <p:clrMapOvr>
+    <a:masterClrMapping/>
+  </p:clrMapOvr>
+</p:sld>
+</file>
+
+<file path=ppt/slides/slide20.xml><?xml version="1.0" encoding="utf-8"?>
+<p:sld xmlns:a="http://schemas.openxmlformats.org/drawingml/2006/main" xmlns:r="http://schemas.openxmlformats.org/officeDocument/2006/relationships" xmlns:p="http://schemas.openxmlformats.org/presentationml/2006/main">
+  <p:cSld>
+    <p:spTree>
+      <p:nvGrpSpPr>
+        <p:cNvPr id="1" name="">
+          <a:extLst>
+            <a:ext uri="{FF2B5EF4-FFF2-40B4-BE49-F238E27FC236}">
+              <a16:creationId xmlns:a16="http://schemas.microsoft.com/office/drawing/2014/main" id="{6F9849F7-3BC5-194B-91EE-650748E25222}"/>
+            </a:ext>
+          </a:extLst>
+        </p:cNvPr>
+        <p:cNvGrpSpPr/>
+        <p:nvPr/>
+      </p:nvGrpSpPr>
+      <p:grpSpPr>
+        <a:xfrm>
+          <a:off x="0" y="0"/>
+          <a:ext cx="0" cy="0"/>
+          <a:chOff x="0" y="0"/>
+          <a:chExt cx="0" cy="0"/>
+        </a:xfrm>
+      </p:grpSpPr>
+      <p:sp>
+        <p:nvSpPr>
+          <p:cNvPr id="2" name="Title 1">
+            <a:extLst>
+              <a:ext uri="{FF2B5EF4-FFF2-40B4-BE49-F238E27FC236}">
+                <a16:creationId xmlns:a16="http://schemas.microsoft.com/office/drawing/2014/main" id="{3A603420-E5A9-123A-BB97-20B45D5462C6}"/>
+              </a:ext>
+            </a:extLst>
+          </p:cNvPr>
+          <p:cNvSpPr>
+            <a:spLocks noGrp="1"/>
+          </p:cNvSpPr>
+          <p:nvPr>
+            <p:ph type="title"/>
+          </p:nvPr>
+        </p:nvSpPr>
+        <p:spPr/>
+        <p:txBody>
+          <a:bodyPr/>
+          <a:lstStyle/>
+          <a:p>
+            <a:r>
+              <a:rPr lang="en-US" dirty="0"/>
+              <a:t>D3 Basics: axes</a:t>
+            </a:r>
+          </a:p>
+        </p:txBody>
+      </p:sp>
+      <p:sp>
+        <p:nvSpPr>
+          <p:cNvPr id="6" name="TextBox 5">
+            <a:extLst>
+              <a:ext uri="{FF2B5EF4-FFF2-40B4-BE49-F238E27FC236}">
+                <a16:creationId xmlns:a16="http://schemas.microsoft.com/office/drawing/2014/main" id="{4C399E18-E966-53C8-01AF-CFEAA9FED54C}"/>
+              </a:ext>
+            </a:extLst>
+          </p:cNvPr>
+          <p:cNvSpPr txBox="1"/>
+          <p:nvPr/>
+        </p:nvSpPr>
+        <p:spPr>
+          <a:xfrm>
+            <a:off x="7980219" y="6331527"/>
+            <a:ext cx="4067786" cy="369332"/>
+          </a:xfrm>
+          <a:prstGeom prst="rect">
+            <a:avLst/>
+          </a:prstGeom>
+          <a:noFill/>
+        </p:spPr>
+        <p:txBody>
+          <a:bodyPr wrap="square" rtlCol="0">
+            <a:spAutoFit/>
+          </a:bodyPr>
+          <a:lstStyle/>
+          <a:p>
+            <a:r>
+              <a:rPr lang="en-US" dirty="0"/>
+              <a:t>https://www.d3indepth.com/introduction/</a:t>
+            </a:r>
+          </a:p>
+        </p:txBody>
+      </p:sp>
+      <p:sp>
+        <p:nvSpPr>
+          <p:cNvPr id="3" name="Content Placeholder 2">
+            <a:extLst>
+              <a:ext uri="{FF2B5EF4-FFF2-40B4-BE49-F238E27FC236}">
+                <a16:creationId xmlns:a16="http://schemas.microsoft.com/office/drawing/2014/main" id="{C1F369DA-FB70-B316-577A-0994FE244E0D}"/>
+              </a:ext>
+            </a:extLst>
+          </p:cNvPr>
+          <p:cNvSpPr>
+            <a:spLocks noGrp="1"/>
+          </p:cNvSpPr>
+          <p:nvPr>
+            <p:ph idx="1"/>
+          </p:nvPr>
+        </p:nvSpPr>
+        <p:spPr>
+          <a:xfrm>
+            <a:off x="581192" y="1911927"/>
+            <a:ext cx="3630589" cy="4558145"/>
+          </a:xfrm>
+        </p:spPr>
+        <p:txBody>
+          <a:bodyPr anchor="t">
+            <a:normAutofit/>
+          </a:bodyPr>
+          <a:lstStyle/>
+          <a:p>
+            <a:r>
+              <a:rPr lang="en-US" sz="2200" dirty="0"/>
+              <a:t>To create an axis we need:</a:t>
+            </a:r>
+          </a:p>
+          <a:p>
+            <a:pPr lvl="1"/>
+            <a:r>
+              <a:rPr lang="en-US" sz="2200" dirty="0"/>
+              <a:t>an SVG element to contain the axis (usually a g element)</a:t>
+            </a:r>
+          </a:p>
+          <a:p>
+            <a:pPr lvl="1"/>
+            <a:r>
+              <a:rPr lang="en-US" sz="2200" dirty="0"/>
+              <a:t>a D3 </a:t>
+            </a:r>
+            <a:r>
+              <a:rPr lang="en-US" sz="2200" u="sng" dirty="0">
+                <a:hlinkClick r:id="rId2"/>
+              </a:rPr>
+              <a:t>scale function</a:t>
+            </a:r>
+            <a:endParaRPr lang="en-US" sz="2200" u="sng" dirty="0"/>
+          </a:p>
+          <a:p>
+            <a:pPr marL="0" indent="0">
+              <a:buNone/>
+            </a:pPr>
+            <a:endParaRPr lang="en-US" sz="2200" dirty="0"/>
+          </a:p>
+        </p:txBody>
+      </p:sp>
+      <p:pic>
+        <p:nvPicPr>
+          <p:cNvPr id="7" name="Picture 6" descr="A screenshot of a computer program&#10;&#10;AI-generated content may be incorrect.">
+            <a:extLst>
+              <a:ext uri="{FF2B5EF4-FFF2-40B4-BE49-F238E27FC236}">
+                <a16:creationId xmlns:a16="http://schemas.microsoft.com/office/drawing/2014/main" id="{765DBD66-5F1D-8A68-BFDF-371380710B00}"/>
+              </a:ext>
+            </a:extLst>
+          </p:cNvPr>
+          <p:cNvPicPr>
+            <a:picLocks noChangeAspect="1"/>
+          </p:cNvPicPr>
+          <p:nvPr/>
+        </p:nvPicPr>
+        <p:blipFill>
+          <a:blip r:embed="rId3"/>
+          <a:stretch>
+            <a:fillRect/>
+          </a:stretch>
+        </p:blipFill>
+        <p:spPr>
+          <a:xfrm>
+            <a:off x="4275605" y="2060965"/>
+            <a:ext cx="7772400" cy="3925553"/>
+          </a:xfrm>
+          <a:prstGeom prst="rect">
+            <a:avLst/>
+          </a:prstGeom>
+        </p:spPr>
+      </p:pic>
+      <p:sp>
+        <p:nvSpPr>
+          <p:cNvPr id="8" name="Rounded Rectangular Callout 7">
+            <a:extLst>
+              <a:ext uri="{FF2B5EF4-FFF2-40B4-BE49-F238E27FC236}">
+                <a16:creationId xmlns:a16="http://schemas.microsoft.com/office/drawing/2014/main" id="{50FBDF51-E1EC-0397-C80D-19BA1A4E6F8F}"/>
+              </a:ext>
+            </a:extLst>
+          </p:cNvPr>
+          <p:cNvSpPr/>
+          <p:nvPr/>
+        </p:nvSpPr>
+        <p:spPr>
+          <a:xfrm>
+            <a:off x="581192" y="4502727"/>
+            <a:ext cx="3311935" cy="1371600"/>
+          </a:xfrm>
+          <a:prstGeom prst="wedgeRoundRectCallout">
+            <a:avLst>
+              <a:gd name="adj1" fmla="val 76361"/>
+              <a:gd name="adj2" fmla="val -40530"/>
+              <a:gd name="adj3" fmla="val 16667"/>
+            </a:avLst>
+          </a:prstGeom>
+        </p:spPr>
+        <p:style>
+          <a:lnRef idx="2">
+            <a:schemeClr val="accent1">
+              <a:shade val="15000"/>
+            </a:schemeClr>
+          </a:lnRef>
+          <a:fillRef idx="1">
+            <a:schemeClr val="accent1"/>
+          </a:fillRef>
+          <a:effectRef idx="0">
+            <a:schemeClr val="accent1"/>
+          </a:effectRef>
+          <a:fontRef idx="minor">
+            <a:schemeClr val="lt1"/>
+          </a:fontRef>
+        </p:style>
+        <p:txBody>
+          <a:bodyPr rtlCol="0" anchor="ctr"/>
+          <a:lstStyle/>
+          <a:p>
+            <a:pPr algn="ctr"/>
+            <a:r>
+              <a:rPr lang="en-US" dirty="0"/>
+              <a:t>.call takes a function that operates on a selection as a parameter</a:t>
+            </a:r>
+          </a:p>
+        </p:txBody>
+      </p:sp>
+    </p:spTree>
+    <p:extLst>
+      <p:ext uri="{BB962C8B-B14F-4D97-AF65-F5344CB8AC3E}">
+        <p14:creationId xmlns:p14="http://schemas.microsoft.com/office/powerpoint/2010/main" val="1245484118"/>
+      </p:ext>
+    </p:extLst>
+  </p:cSld>
+  <p:clrMapOvr>
+    <a:masterClrMapping/>
+  </p:clrMapOvr>
+  <p:timing>
+    <p:tnLst>
+      <p:par>
+        <p:cTn id="1" dur="indefinite" restart="never" nodeType="tmRoot">
+          <p:childTnLst>
+            <p:seq concurrent="1" nextAc="seek">
+              <p:cTn id="2" dur="indefinite" nodeType="mainSeq">
+                <p:childTnLst>
+                  <p:par>
+                    <p:cTn id="3" fill="hold">
+                      <p:stCondLst>
+                        <p:cond delay="indefinite"/>
+                      </p:stCondLst>
+                      <p:childTnLst>
+                        <p:par>
+                          <p:cTn id="4" fill="hold">
+                            <p:stCondLst>
+                              <p:cond delay="0"/>
+                            </p:stCondLst>
+                            <p:childTnLst>
+                              <p:par>
+                                <p:cTn id="5" presetID="1" presetClass="entr" presetSubtype="0" fill="hold" grpId="0" nodeType="clickEffect">
+                                  <p:stCondLst>
+                                    <p:cond delay="0"/>
+                                  </p:stCondLst>
+                                  <p:childTnLst>
+                                    <p:set>
+                                      <p:cBhvr>
+                                        <p:cTn id="6" dur="1" fill="hold">
+                                          <p:stCondLst>
+                                            <p:cond delay="0"/>
+                                          </p:stCondLst>
+                                        </p:cTn>
+                                        <p:tgtEl>
+                                          <p:spTgt spid="8"/>
+                                        </p:tgtEl>
+                                        <p:attrNameLst>
+                                          <p:attrName>style.visibility</p:attrName>
+                                        </p:attrNameLst>
+                                      </p:cBhvr>
+                                      <p:to>
+                                        <p:strVal val="visible"/>
+                                      </p:to>
+                                    </p:set>
+                                  </p:childTnLst>
+                                </p:cTn>
+                              </p:par>
+                            </p:childTnLst>
+                          </p:cTn>
+                        </p:par>
+                      </p:childTnLst>
+                    </p:cTn>
+                  </p:par>
+                </p:childTnLst>
+              </p:cTn>
+              <p:prevCondLst>
+                <p:cond evt="onPrev" delay="0">
+                  <p:tgtEl>
+                    <p:sldTgt/>
+                  </p:tgtEl>
+                </p:cond>
+              </p:prevCondLst>
+              <p:nextCondLst>
+                <p:cond evt="onNext" delay="0">
+                  <p:tgtEl>
+                    <p:sldTgt/>
+                  </p:tgtEl>
+                </p:cond>
+              </p:nextCondLst>
+            </p:seq>
+          </p:childTnLst>
+        </p:cTn>
+      </p:par>
+    </p:tnLst>
+    <p:bldLst>
+      <p:bldP spid="8" grpId="0" animBg="1"/>
+    </p:bldLst>
+  </p:timing>
+</p:sld>
+</file>
+
+<file path=ppt/slides/slide21.xml><?xml version="1.0" encoding="utf-8"?>
+<p:sld xmlns:a="http://schemas.openxmlformats.org/drawingml/2006/main" xmlns:r="http://schemas.openxmlformats.org/officeDocument/2006/relationships" xmlns:p="http://schemas.openxmlformats.org/presentationml/2006/main">
+  <p:cSld>
+    <p:spTree>
+      <p:nvGrpSpPr>
+        <p:cNvPr id="1" name="">
+          <a:extLst>
+            <a:ext uri="{FF2B5EF4-FFF2-40B4-BE49-F238E27FC236}">
+              <a16:creationId xmlns:a16="http://schemas.microsoft.com/office/drawing/2014/main" id="{EC023AD4-4D27-A357-2A02-32D6F9D8243C}"/>
+            </a:ext>
+          </a:extLst>
+        </p:cNvPr>
+        <p:cNvGrpSpPr/>
+        <p:nvPr/>
+      </p:nvGrpSpPr>
+      <p:grpSpPr>
+        <a:xfrm>
+          <a:off x="0" y="0"/>
+          <a:ext cx="0" cy="0"/>
+          <a:chOff x="0" y="0"/>
+          <a:chExt cx="0" cy="0"/>
+        </a:xfrm>
+      </p:grpSpPr>
+      <p:sp>
+        <p:nvSpPr>
+          <p:cNvPr id="2" name="Title 1">
+            <a:extLst>
+              <a:ext uri="{FF2B5EF4-FFF2-40B4-BE49-F238E27FC236}">
+                <a16:creationId xmlns:a16="http://schemas.microsoft.com/office/drawing/2014/main" id="{2EA1E1EE-2836-2686-7579-E5611E446E17}"/>
+              </a:ext>
+            </a:extLst>
+          </p:cNvPr>
+          <p:cNvSpPr>
+            <a:spLocks noGrp="1"/>
+          </p:cNvSpPr>
+          <p:nvPr>
+            <p:ph type="title"/>
+          </p:nvPr>
+        </p:nvSpPr>
+        <p:spPr/>
+        <p:txBody>
+          <a:bodyPr/>
+          <a:lstStyle/>
+          <a:p>
+            <a:r>
+              <a:rPr lang="en-US" dirty="0"/>
+              <a:t>D3 Basics: axes</a:t>
+            </a:r>
+          </a:p>
+        </p:txBody>
+      </p:sp>
+      <p:sp>
+        <p:nvSpPr>
+          <p:cNvPr id="6" name="TextBox 5">
+            <a:extLst>
+              <a:ext uri="{FF2B5EF4-FFF2-40B4-BE49-F238E27FC236}">
+                <a16:creationId xmlns:a16="http://schemas.microsoft.com/office/drawing/2014/main" id="{D860BA75-BD90-4098-8A0D-ACB45E5F5CA9}"/>
+              </a:ext>
+            </a:extLst>
+          </p:cNvPr>
+          <p:cNvSpPr txBox="1"/>
+          <p:nvPr/>
+        </p:nvSpPr>
+        <p:spPr>
+          <a:xfrm>
+            <a:off x="7989937" y="6401988"/>
+            <a:ext cx="4067786" cy="369332"/>
+          </a:xfrm>
+          <a:prstGeom prst="rect">
+            <a:avLst/>
+          </a:prstGeom>
+          <a:noFill/>
+        </p:spPr>
+        <p:txBody>
+          <a:bodyPr wrap="square" rtlCol="0">
+            <a:spAutoFit/>
+          </a:bodyPr>
+          <a:lstStyle/>
+          <a:p>
+            <a:r>
+              <a:rPr lang="en-US" dirty="0"/>
+              <a:t>https://www.d3indepth.com/introduction/</a:t>
+            </a:r>
+          </a:p>
+        </p:txBody>
+      </p:sp>
+      <p:sp>
+        <p:nvSpPr>
+          <p:cNvPr id="3" name="Content Placeholder 2">
+            <a:extLst>
+              <a:ext uri="{FF2B5EF4-FFF2-40B4-BE49-F238E27FC236}">
+                <a16:creationId xmlns:a16="http://schemas.microsoft.com/office/drawing/2014/main" id="{BA6EC230-641E-E265-1C68-423C17C1D38C}"/>
+              </a:ext>
+            </a:extLst>
+          </p:cNvPr>
+          <p:cNvSpPr>
+            <a:spLocks noGrp="1"/>
+          </p:cNvSpPr>
+          <p:nvPr>
+            <p:ph idx="1"/>
+          </p:nvPr>
+        </p:nvSpPr>
+        <p:spPr>
+          <a:xfrm>
+            <a:off x="581192" y="1911927"/>
+            <a:ext cx="3403601" cy="4558145"/>
+          </a:xfrm>
+        </p:spPr>
+        <p:txBody>
+          <a:bodyPr anchor="t">
+            <a:normAutofit/>
+          </a:bodyPr>
+          <a:lstStyle/>
+          <a:p>
+            <a:r>
+              <a:rPr lang="en-US" sz="2200" dirty="0"/>
+              <a:t>Aside: we can dynamically add SVG containers to HTML using D3</a:t>
+            </a:r>
+          </a:p>
+        </p:txBody>
+      </p:sp>
+      <p:pic>
+        <p:nvPicPr>
+          <p:cNvPr id="5" name="Picture 4" descr="A screen shot of a computer program&#10;&#10;AI-generated content may be incorrect.">
+            <a:extLst>
+              <a:ext uri="{FF2B5EF4-FFF2-40B4-BE49-F238E27FC236}">
+                <a16:creationId xmlns:a16="http://schemas.microsoft.com/office/drawing/2014/main" id="{76C9C0D0-EE67-862B-A2DB-11823004C746}"/>
+              </a:ext>
+            </a:extLst>
+          </p:cNvPr>
+          <p:cNvPicPr>
+            <a:picLocks noChangeAspect="1"/>
+          </p:cNvPicPr>
+          <p:nvPr/>
+        </p:nvPicPr>
+        <p:blipFill>
+          <a:blip r:embed="rId2"/>
+          <a:stretch>
+            <a:fillRect/>
+          </a:stretch>
+        </p:blipFill>
+        <p:spPr>
+          <a:xfrm>
+            <a:off x="3975894" y="1985240"/>
+            <a:ext cx="5930900" cy="4279900"/>
+          </a:xfrm>
+          <a:prstGeom prst="rect">
+            <a:avLst/>
+          </a:prstGeom>
+        </p:spPr>
+      </p:pic>
+      <p:pic>
+        <p:nvPicPr>
+          <p:cNvPr id="12" name="Picture 11" descr="A computer code with colorful letters&#10;&#10;AI-generated content may be incorrect.">
+            <a:extLst>
+              <a:ext uri="{FF2B5EF4-FFF2-40B4-BE49-F238E27FC236}">
+                <a16:creationId xmlns:a16="http://schemas.microsoft.com/office/drawing/2014/main" id="{59809281-FA4B-56B6-4368-474700C513B8}"/>
+              </a:ext>
+            </a:extLst>
+          </p:cNvPr>
+          <p:cNvPicPr>
+            <a:picLocks noChangeAspect="1"/>
+          </p:cNvPicPr>
+          <p:nvPr/>
+        </p:nvPicPr>
+        <p:blipFill>
+          <a:blip r:embed="rId3"/>
+          <a:stretch>
+            <a:fillRect/>
+          </a:stretch>
+        </p:blipFill>
+        <p:spPr>
+          <a:xfrm>
+            <a:off x="508066" y="3073400"/>
+            <a:ext cx="3403600" cy="711200"/>
+          </a:xfrm>
+          <a:prstGeom prst="rect">
+            <a:avLst/>
+          </a:prstGeom>
+        </p:spPr>
+      </p:pic>
+      <p:pic>
+        <p:nvPicPr>
+          <p:cNvPr id="14" name="Picture 13" descr="A screenshot of a computer&#10;&#10;AI-generated content may be incorrect.">
+            <a:extLst>
+              <a:ext uri="{FF2B5EF4-FFF2-40B4-BE49-F238E27FC236}">
+                <a16:creationId xmlns:a16="http://schemas.microsoft.com/office/drawing/2014/main" id="{04FF1F42-8BEA-FC15-83B1-C66AF0C440BC}"/>
+              </a:ext>
+            </a:extLst>
+          </p:cNvPr>
+          <p:cNvPicPr>
+            <a:picLocks noChangeAspect="1"/>
+          </p:cNvPicPr>
+          <p:nvPr/>
+        </p:nvPicPr>
+        <p:blipFill>
+          <a:blip r:embed="rId4"/>
+          <a:stretch>
+            <a:fillRect/>
+          </a:stretch>
+        </p:blipFill>
+        <p:spPr>
+          <a:xfrm>
+            <a:off x="9639288" y="0"/>
+            <a:ext cx="5631897" cy="6858000"/>
+          </a:xfrm>
+          <a:prstGeom prst="rect">
+            <a:avLst/>
+          </a:prstGeom>
+        </p:spPr>
+      </p:pic>
+    </p:spTree>
+    <p:extLst>
+      <p:ext uri="{BB962C8B-B14F-4D97-AF65-F5344CB8AC3E}">
+        <p14:creationId xmlns:p14="http://schemas.microsoft.com/office/powerpoint/2010/main" val="4293051077"/>
+      </p:ext>
+    </p:extLst>
+  </p:cSld>
+  <p:clrMapOvr>
+    <a:masterClrMapping/>
+  </p:clrMapOvr>
+</p:sld>
+</file>
+
+<file path=ppt/slides/slide22.xml><?xml version="1.0" encoding="utf-8"?>
+<p:sld xmlns:a="http://schemas.openxmlformats.org/drawingml/2006/main" xmlns:r="http://schemas.openxmlformats.org/officeDocument/2006/relationships" xmlns:p="http://schemas.openxmlformats.org/presentationml/2006/main">
+  <p:cSld>
+    <p:spTree>
+      <p:nvGrpSpPr>
+        <p:cNvPr id="1" name="">
+          <a:extLst>
+            <a:ext uri="{FF2B5EF4-FFF2-40B4-BE49-F238E27FC236}">
+              <a16:creationId xmlns:a16="http://schemas.microsoft.com/office/drawing/2014/main" id="{BD2AC405-B39C-597E-B7E0-12AF49126568}"/>
+            </a:ext>
+          </a:extLst>
+        </p:cNvPr>
+        <p:cNvGrpSpPr/>
+        <p:nvPr/>
+      </p:nvGrpSpPr>
+      <p:grpSpPr>
+        <a:xfrm>
+          <a:off x="0" y="0"/>
+          <a:ext cx="0" cy="0"/>
+          <a:chOff x="0" y="0"/>
+          <a:chExt cx="0" cy="0"/>
+        </a:xfrm>
+      </p:grpSpPr>
+      <p:sp>
+        <p:nvSpPr>
+          <p:cNvPr id="2" name="Title 1">
+            <a:extLst>
+              <a:ext uri="{FF2B5EF4-FFF2-40B4-BE49-F238E27FC236}">
+                <a16:creationId xmlns:a16="http://schemas.microsoft.com/office/drawing/2014/main" id="{0240B171-B079-56EB-096F-38A5D0CF3671}"/>
+              </a:ext>
+            </a:extLst>
+          </p:cNvPr>
+          <p:cNvSpPr>
+            <a:spLocks noGrp="1"/>
+          </p:cNvSpPr>
+          <p:nvPr>
+            <p:ph type="title"/>
+          </p:nvPr>
+        </p:nvSpPr>
+        <p:spPr/>
+        <p:txBody>
+          <a:bodyPr/>
+          <a:lstStyle/>
+          <a:p>
+            <a:r>
+              <a:rPr lang="en-US" dirty="0"/>
+              <a:t>D3 Basics: axes</a:t>
+            </a:r>
+          </a:p>
+        </p:txBody>
+      </p:sp>
+      <p:sp>
+        <p:nvSpPr>
+          <p:cNvPr id="6" name="TextBox 5">
+            <a:extLst>
+              <a:ext uri="{FF2B5EF4-FFF2-40B4-BE49-F238E27FC236}">
+                <a16:creationId xmlns:a16="http://schemas.microsoft.com/office/drawing/2014/main" id="{E3D115B7-2153-AADA-24CD-A5E8C1CBC0B7}"/>
+              </a:ext>
+            </a:extLst>
+          </p:cNvPr>
+          <p:cNvSpPr txBox="1"/>
+          <p:nvPr/>
+        </p:nvSpPr>
+        <p:spPr>
+          <a:xfrm>
+            <a:off x="7980219" y="6331527"/>
+            <a:ext cx="4067786" cy="369332"/>
+          </a:xfrm>
+          <a:prstGeom prst="rect">
+            <a:avLst/>
+          </a:prstGeom>
+          <a:noFill/>
+        </p:spPr>
+        <p:txBody>
+          <a:bodyPr wrap="square" rtlCol="0">
+            <a:spAutoFit/>
+          </a:bodyPr>
+          <a:lstStyle/>
+          <a:p>
+            <a:r>
+              <a:rPr lang="en-US" dirty="0"/>
+              <a:t>https://www.d3indepth.com/introduction/</a:t>
+            </a:r>
+          </a:p>
+        </p:txBody>
+      </p:sp>
+      <p:sp>
+        <p:nvSpPr>
+          <p:cNvPr id="3" name="Content Placeholder 2">
+            <a:extLst>
+              <a:ext uri="{FF2B5EF4-FFF2-40B4-BE49-F238E27FC236}">
+                <a16:creationId xmlns:a16="http://schemas.microsoft.com/office/drawing/2014/main" id="{A04F9A3F-0132-9A4C-B1DB-00EED93FF2C4}"/>
+              </a:ext>
+            </a:extLst>
+          </p:cNvPr>
+          <p:cNvSpPr>
+            <a:spLocks noGrp="1"/>
+          </p:cNvSpPr>
+          <p:nvPr>
+            <p:ph idx="1"/>
+          </p:nvPr>
+        </p:nvSpPr>
+        <p:spPr>
+          <a:xfrm>
+            <a:off x="581192" y="1911927"/>
+            <a:ext cx="3630589" cy="4558145"/>
+          </a:xfrm>
+        </p:spPr>
+        <p:txBody>
+          <a:bodyPr anchor="t">
+            <a:normAutofit/>
+          </a:bodyPr>
+          <a:lstStyle/>
+          <a:p>
+            <a:r>
+              <a:rPr lang="en-US" sz="2200" dirty="0"/>
+              <a:t>Many types of scale methods available</a:t>
+            </a:r>
+            <a:endParaRPr lang="en-US" sz="2200" u="sng" dirty="0"/>
+          </a:p>
+          <a:p>
+            <a:pPr marL="0" indent="0">
+              <a:buNone/>
+            </a:pPr>
+            <a:endParaRPr lang="en-US" sz="2200" dirty="0"/>
+          </a:p>
+        </p:txBody>
+      </p:sp>
+      <p:pic>
+        <p:nvPicPr>
+          <p:cNvPr id="5" name="Picture 4" descr="A row of black lines with numbers&#10;&#10;AI-generated content may be incorrect.">
+            <a:extLst>
+              <a:ext uri="{FF2B5EF4-FFF2-40B4-BE49-F238E27FC236}">
+                <a16:creationId xmlns:a16="http://schemas.microsoft.com/office/drawing/2014/main" id="{6D71B180-B3A0-B3CF-18ED-E9CB322C21E9}"/>
+              </a:ext>
+            </a:extLst>
+          </p:cNvPr>
+          <p:cNvPicPr>
+            <a:picLocks noChangeAspect="1"/>
+          </p:cNvPicPr>
+          <p:nvPr/>
+        </p:nvPicPr>
+        <p:blipFill>
+          <a:blip r:embed="rId2"/>
+          <a:stretch>
+            <a:fillRect/>
+          </a:stretch>
+        </p:blipFill>
+        <p:spPr>
+          <a:xfrm>
+            <a:off x="4094019" y="2075872"/>
+            <a:ext cx="7772400" cy="3652229"/>
+          </a:xfrm>
+          <a:prstGeom prst="rect">
+            <a:avLst/>
+          </a:prstGeom>
+        </p:spPr>
+      </p:pic>
+    </p:spTree>
+    <p:extLst>
+      <p:ext uri="{BB962C8B-B14F-4D97-AF65-F5344CB8AC3E}">
+        <p14:creationId xmlns:p14="http://schemas.microsoft.com/office/powerpoint/2010/main" val="3588384328"/>
+      </p:ext>
+    </p:extLst>
+  </p:cSld>
+  <p:clrMapOvr>
+    <a:masterClrMapping/>
+  </p:clrMapOvr>
+</p:sld>
+</file>
+
+<file path=ppt/slides/slide23.xml><?xml version="1.0" encoding="utf-8"?>
+<p:sld xmlns:a="http://schemas.openxmlformats.org/drawingml/2006/main" xmlns:r="http://schemas.openxmlformats.org/officeDocument/2006/relationships" xmlns:p="http://schemas.openxmlformats.org/presentationml/2006/main">
+  <p:cSld>
+    <p:spTree>
+      <p:nvGrpSpPr>
+        <p:cNvPr id="1" name="">
+          <a:extLst>
+            <a:ext uri="{FF2B5EF4-FFF2-40B4-BE49-F238E27FC236}">
+              <a16:creationId xmlns:a16="http://schemas.microsoft.com/office/drawing/2014/main" id="{9B325293-5C80-5463-DBC0-DC6C39F99A0C}"/>
+            </a:ext>
+          </a:extLst>
+        </p:cNvPr>
+        <p:cNvGrpSpPr/>
+        <p:nvPr/>
+      </p:nvGrpSpPr>
+      <p:grpSpPr>
+        <a:xfrm>
+          <a:off x="0" y="0"/>
+          <a:ext cx="0" cy="0"/>
+          <a:chOff x="0" y="0"/>
+          <a:chExt cx="0" cy="0"/>
+        </a:xfrm>
+      </p:grpSpPr>
+      <p:sp>
+        <p:nvSpPr>
+          <p:cNvPr id="2" name="Title 1">
+            <a:extLst>
+              <a:ext uri="{FF2B5EF4-FFF2-40B4-BE49-F238E27FC236}">
+                <a16:creationId xmlns:a16="http://schemas.microsoft.com/office/drawing/2014/main" id="{96717C04-40EE-D636-C636-1946888A5708}"/>
+              </a:ext>
+            </a:extLst>
+          </p:cNvPr>
+          <p:cNvSpPr>
+            <a:spLocks noGrp="1"/>
+          </p:cNvSpPr>
+          <p:nvPr>
+            <p:ph type="title"/>
+          </p:nvPr>
+        </p:nvSpPr>
+        <p:spPr/>
+        <p:txBody>
+          <a:bodyPr/>
+          <a:lstStyle/>
+          <a:p>
+            <a:r>
+              <a:rPr lang="en-US" dirty="0"/>
+              <a:t>D3 Basics: axes</a:t>
+            </a:r>
+          </a:p>
+        </p:txBody>
+      </p:sp>
+      <p:sp>
+        <p:nvSpPr>
+          <p:cNvPr id="6" name="TextBox 5">
+            <a:extLst>
+              <a:ext uri="{FF2B5EF4-FFF2-40B4-BE49-F238E27FC236}">
+                <a16:creationId xmlns:a16="http://schemas.microsoft.com/office/drawing/2014/main" id="{72588258-ED17-23BE-9D0D-2EA431BEA454}"/>
+              </a:ext>
+            </a:extLst>
+          </p:cNvPr>
+          <p:cNvSpPr txBox="1"/>
+          <p:nvPr/>
+        </p:nvSpPr>
+        <p:spPr>
+          <a:xfrm>
+            <a:off x="7980219" y="6331527"/>
+            <a:ext cx="4067786" cy="369332"/>
+          </a:xfrm>
+          <a:prstGeom prst="rect">
+            <a:avLst/>
+          </a:prstGeom>
+          <a:noFill/>
+        </p:spPr>
+        <p:txBody>
+          <a:bodyPr wrap="square" rtlCol="0">
+            <a:spAutoFit/>
+          </a:bodyPr>
+          <a:lstStyle/>
+          <a:p>
+            <a:r>
+              <a:rPr lang="en-US" dirty="0"/>
+              <a:t>https://www.d3indepth.com/introduction/</a:t>
+            </a:r>
+          </a:p>
+        </p:txBody>
+      </p:sp>
+      <p:sp>
+        <p:nvSpPr>
+          <p:cNvPr id="3" name="Content Placeholder 2">
+            <a:extLst>
+              <a:ext uri="{FF2B5EF4-FFF2-40B4-BE49-F238E27FC236}">
+                <a16:creationId xmlns:a16="http://schemas.microsoft.com/office/drawing/2014/main" id="{9ECFAA3E-95E9-B900-0E56-0770C7C8BA52}"/>
+              </a:ext>
+            </a:extLst>
+          </p:cNvPr>
+          <p:cNvSpPr>
+            <a:spLocks noGrp="1"/>
+          </p:cNvSpPr>
+          <p:nvPr>
+            <p:ph idx="1"/>
+          </p:nvPr>
+        </p:nvSpPr>
+        <p:spPr>
+          <a:xfrm>
+            <a:off x="581192" y="1911927"/>
+            <a:ext cx="4835935" cy="4558145"/>
+          </a:xfrm>
+        </p:spPr>
+        <p:txBody>
+          <a:bodyPr anchor="t">
+            <a:normAutofit/>
+          </a:bodyPr>
+          <a:lstStyle/>
+          <a:p>
+            <a:r>
+              <a:rPr lang="en-US" sz="2200" dirty="0" err="1">
+                <a:latin typeface="Consolas" panose="020B0609020204030204" pitchFamily="49" charset="0"/>
+                <a:cs typeface="Consolas" panose="020B0609020204030204" pitchFamily="49" charset="0"/>
+              </a:rPr>
+              <a:t>scaleBand</a:t>
+            </a:r>
+            <a:r>
+              <a:rPr lang="en-US" sz="2200" dirty="0"/>
+              <a:t> is particularly useful for bar charts</a:t>
+            </a:r>
+          </a:p>
+          <a:p>
+            <a:r>
+              <a:rPr lang="en-US" sz="2200" dirty="0">
+                <a:latin typeface="Consolas" panose="020B0609020204030204" pitchFamily="49" charset="0"/>
+                <a:cs typeface="Consolas" panose="020B0609020204030204" pitchFamily="49" charset="0"/>
+              </a:rPr>
+              <a:t>.bandwidth() </a:t>
+            </a:r>
+            <a:r>
+              <a:rPr lang="en-US" sz="2200" dirty="0"/>
+              <a:t>will return the width of each band in the scale</a:t>
+            </a:r>
+          </a:p>
+          <a:p>
+            <a:r>
+              <a:rPr lang="en-US" sz="2200" dirty="0">
+                <a:latin typeface="Consolas" panose="020B0609020204030204" pitchFamily="49" charset="0"/>
+                <a:cs typeface="Consolas" panose="020B0609020204030204" pitchFamily="49" charset="0"/>
+              </a:rPr>
+              <a:t>.</a:t>
+            </a:r>
+            <a:r>
+              <a:rPr lang="en-US" sz="2200" dirty="0" err="1">
+                <a:latin typeface="Consolas" panose="020B0609020204030204" pitchFamily="49" charset="0"/>
+                <a:cs typeface="Consolas" panose="020B0609020204030204" pitchFamily="49" charset="0"/>
+              </a:rPr>
+              <a:t>paddingInner</a:t>
+            </a:r>
+            <a:r>
+              <a:rPr lang="en-US" sz="2200" dirty="0">
+                <a:latin typeface="Consolas" panose="020B0609020204030204" pitchFamily="49" charset="0"/>
+                <a:cs typeface="Consolas" panose="020B0609020204030204" pitchFamily="49" charset="0"/>
+              </a:rPr>
+              <a:t>(percentage) </a:t>
+            </a:r>
+            <a:r>
+              <a:rPr lang="en-US" sz="2200" dirty="0"/>
+              <a:t>will set padding between bands</a:t>
+            </a:r>
+          </a:p>
+          <a:p>
+            <a:pPr marL="0" indent="0">
+              <a:buNone/>
+            </a:pPr>
+            <a:endParaRPr lang="en-US" sz="2200" dirty="0"/>
+          </a:p>
+        </p:txBody>
+      </p:sp>
+      <p:pic>
+        <p:nvPicPr>
+          <p:cNvPr id="7" name="Picture 6" descr="A white rectangular object with blue text&#10;&#10;AI-generated content may be incorrect.">
+            <a:extLst>
+              <a:ext uri="{FF2B5EF4-FFF2-40B4-BE49-F238E27FC236}">
+                <a16:creationId xmlns:a16="http://schemas.microsoft.com/office/drawing/2014/main" id="{0EA0572C-8F25-0ABE-2D2D-DD471851CC5C}"/>
+              </a:ext>
+            </a:extLst>
+          </p:cNvPr>
+          <p:cNvPicPr>
+            <a:picLocks noChangeAspect="1"/>
+          </p:cNvPicPr>
+          <p:nvPr/>
+        </p:nvPicPr>
+        <p:blipFill>
+          <a:blip r:embed="rId2"/>
+          <a:stretch>
+            <a:fillRect/>
+          </a:stretch>
+        </p:blipFill>
+        <p:spPr>
+          <a:xfrm>
+            <a:off x="5954848" y="1931460"/>
+            <a:ext cx="10060308" cy="2244124"/>
+          </a:xfrm>
+          <a:prstGeom prst="rect">
+            <a:avLst/>
+          </a:prstGeom>
+        </p:spPr>
+      </p:pic>
+      <p:pic>
+        <p:nvPicPr>
+          <p:cNvPr id="9" name="Picture 8">
+            <a:extLst>
+              <a:ext uri="{FF2B5EF4-FFF2-40B4-BE49-F238E27FC236}">
+                <a16:creationId xmlns:a16="http://schemas.microsoft.com/office/drawing/2014/main" id="{663363CF-5465-0B70-C217-110CA65AF915}"/>
+              </a:ext>
+            </a:extLst>
+          </p:cNvPr>
+          <p:cNvPicPr>
+            <a:picLocks noChangeAspect="1"/>
+          </p:cNvPicPr>
+          <p:nvPr/>
+        </p:nvPicPr>
+        <p:blipFill>
+          <a:blip r:embed="rId3"/>
+          <a:stretch>
+            <a:fillRect/>
+          </a:stretch>
+        </p:blipFill>
+        <p:spPr>
+          <a:xfrm>
+            <a:off x="5954855" y="3671485"/>
+            <a:ext cx="10060301" cy="823349"/>
+          </a:xfrm>
+          <a:prstGeom prst="rect">
+            <a:avLst/>
+          </a:prstGeom>
+        </p:spPr>
+      </p:pic>
+      <p:pic>
+        <p:nvPicPr>
+          <p:cNvPr id="11" name="Picture 10" descr="A white card with numbers and dots&#10;&#10;AI-generated content may be incorrect.">
+            <a:extLst>
+              <a:ext uri="{FF2B5EF4-FFF2-40B4-BE49-F238E27FC236}">
+                <a16:creationId xmlns:a16="http://schemas.microsoft.com/office/drawing/2014/main" id="{124F6EAF-EBA9-6924-45E7-D2E0643EFD57}"/>
+              </a:ext>
+            </a:extLst>
+          </p:cNvPr>
+          <p:cNvPicPr>
+            <a:picLocks noChangeAspect="1"/>
+          </p:cNvPicPr>
+          <p:nvPr/>
+        </p:nvPicPr>
+        <p:blipFill>
+          <a:blip r:embed="rId4"/>
+          <a:stretch>
+            <a:fillRect/>
+          </a:stretch>
+        </p:blipFill>
+        <p:spPr>
+          <a:xfrm>
+            <a:off x="5954849" y="4326241"/>
+            <a:ext cx="10060307" cy="1809315"/>
+          </a:xfrm>
+          <a:prstGeom prst="rect">
+            <a:avLst/>
+          </a:prstGeom>
+        </p:spPr>
+      </p:pic>
+    </p:spTree>
+    <p:extLst>
+      <p:ext uri="{BB962C8B-B14F-4D97-AF65-F5344CB8AC3E}">
+        <p14:creationId xmlns:p14="http://schemas.microsoft.com/office/powerpoint/2010/main" val="495682"/>
+      </p:ext>
+    </p:extLst>
+  </p:cSld>
+  <p:clrMapOvr>
+    <a:masterClrMapping/>
+  </p:clrMapOvr>
+</p:sld>
+</file>
+
+<file path=ppt/slides/slide24.xml><?xml version="1.0" encoding="utf-8"?>
+<p:sld xmlns:a="http://schemas.openxmlformats.org/drawingml/2006/main" xmlns:r="http://schemas.openxmlformats.org/officeDocument/2006/relationships" xmlns:p="http://schemas.openxmlformats.org/presentationml/2006/main">
+  <p:cSld>
+    <p:spTree>
+      <p:nvGrpSpPr>
+        <p:cNvPr id="1" name="">
+          <a:extLst>
+            <a:ext uri="{FF2B5EF4-FFF2-40B4-BE49-F238E27FC236}">
+              <a16:creationId xmlns:a16="http://schemas.microsoft.com/office/drawing/2014/main" id="{FE0A0787-9B62-BE60-0E48-EB8F1BA4A1B9}"/>
+            </a:ext>
+          </a:extLst>
+        </p:cNvPr>
+        <p:cNvGrpSpPr/>
+        <p:nvPr/>
+      </p:nvGrpSpPr>
+      <p:grpSpPr>
+        <a:xfrm>
+          <a:off x="0" y="0"/>
+          <a:ext cx="0" cy="0"/>
+          <a:chOff x="0" y="0"/>
+          <a:chExt cx="0" cy="0"/>
+        </a:xfrm>
+      </p:grpSpPr>
+      <p:sp>
+        <p:nvSpPr>
+          <p:cNvPr id="2" name="Title 1">
+            <a:extLst>
+              <a:ext uri="{FF2B5EF4-FFF2-40B4-BE49-F238E27FC236}">
+                <a16:creationId xmlns:a16="http://schemas.microsoft.com/office/drawing/2014/main" id="{9FD85359-C06F-F7E7-C5C9-46F5F1430438}"/>
+              </a:ext>
+            </a:extLst>
+          </p:cNvPr>
+          <p:cNvSpPr>
+            <a:spLocks noGrp="1"/>
+          </p:cNvSpPr>
+          <p:nvPr>
+            <p:ph type="title"/>
+          </p:nvPr>
+        </p:nvSpPr>
+        <p:spPr/>
+        <p:txBody>
+          <a:bodyPr/>
+          <a:lstStyle/>
+          <a:p>
+            <a:r>
+              <a:rPr lang="en-US" dirty="0"/>
+              <a:t>D3 Basics: Axes</a:t>
+            </a:r>
+          </a:p>
+        </p:txBody>
+      </p:sp>
+      <p:sp>
+        <p:nvSpPr>
+          <p:cNvPr id="6" name="TextBox 5">
+            <a:extLst>
+              <a:ext uri="{FF2B5EF4-FFF2-40B4-BE49-F238E27FC236}">
+                <a16:creationId xmlns:a16="http://schemas.microsoft.com/office/drawing/2014/main" id="{725BD33A-11DC-63B4-0A02-D6AA7B3D16BE}"/>
+              </a:ext>
+            </a:extLst>
+          </p:cNvPr>
+          <p:cNvSpPr txBox="1"/>
+          <p:nvPr/>
+        </p:nvSpPr>
+        <p:spPr>
+          <a:xfrm>
+            <a:off x="7680870" y="6483750"/>
+            <a:ext cx="4511130" cy="369332"/>
+          </a:xfrm>
+          <a:prstGeom prst="rect">
+            <a:avLst/>
+          </a:prstGeom>
+          <a:noFill/>
+        </p:spPr>
+        <p:txBody>
+          <a:bodyPr wrap="square" rtlCol="0">
+            <a:spAutoFit/>
+          </a:bodyPr>
+          <a:lstStyle/>
+          <a:p>
+            <a:r>
+              <a:rPr lang="en-US" dirty="0"/>
+              <a:t>https://www.d3indepth.com/introduction/</a:t>
+            </a:r>
+          </a:p>
+        </p:txBody>
+      </p:sp>
+      <p:sp>
+        <p:nvSpPr>
+          <p:cNvPr id="3" name="Content Placeholder 2">
+            <a:extLst>
+              <a:ext uri="{FF2B5EF4-FFF2-40B4-BE49-F238E27FC236}">
+                <a16:creationId xmlns:a16="http://schemas.microsoft.com/office/drawing/2014/main" id="{6ED1BAE2-3663-DA31-DBDA-D20FEEAB229E}"/>
+              </a:ext>
+            </a:extLst>
+          </p:cNvPr>
+          <p:cNvSpPr>
+            <a:spLocks noGrp="1"/>
+          </p:cNvSpPr>
+          <p:nvPr>
+            <p:ph idx="1"/>
+          </p:nvPr>
+        </p:nvSpPr>
+        <p:spPr>
+          <a:xfrm>
+            <a:off x="581194" y="1911927"/>
+            <a:ext cx="4267898" cy="4558145"/>
+          </a:xfrm>
+        </p:spPr>
+        <p:txBody>
+          <a:bodyPr anchor="t">
+            <a:normAutofit/>
+          </a:bodyPr>
+          <a:lstStyle/>
+          <a:p>
+            <a:r>
+              <a:rPr lang="en-US" sz="2200" dirty="0"/>
+              <a:t>Your turn:</a:t>
+            </a:r>
+          </a:p>
+          <a:p>
+            <a:pPr lvl="1"/>
+            <a:r>
+              <a:rPr lang="en-US" sz="2000" dirty="0"/>
+              <a:t>Add a horizontal axis to the fruit bars to identify which bar is which fruit</a:t>
+            </a:r>
+          </a:p>
+        </p:txBody>
+      </p:sp>
+      <p:pic>
+        <p:nvPicPr>
+          <p:cNvPr id="7" name="Picture 6" descr="A screen shot of a computer code&#10;&#10;AI-generated content may be incorrect.">
+            <a:extLst>
+              <a:ext uri="{FF2B5EF4-FFF2-40B4-BE49-F238E27FC236}">
+                <a16:creationId xmlns:a16="http://schemas.microsoft.com/office/drawing/2014/main" id="{15D8DC87-75CD-4C64-E668-1B21E2D221D2}"/>
+              </a:ext>
+            </a:extLst>
+          </p:cNvPr>
+          <p:cNvPicPr>
+            <a:picLocks noChangeAspect="1"/>
+          </p:cNvPicPr>
+          <p:nvPr/>
+        </p:nvPicPr>
+        <p:blipFill>
+          <a:blip r:embed="rId2"/>
+          <a:srcRect l="13498"/>
+          <a:stretch>
+            <a:fillRect/>
+          </a:stretch>
+        </p:blipFill>
+        <p:spPr>
+          <a:xfrm>
+            <a:off x="171590" y="4438457"/>
+            <a:ext cx="4793673" cy="1717387"/>
+          </a:xfrm>
+          <a:prstGeom prst="rect">
+            <a:avLst/>
+          </a:prstGeom>
+        </p:spPr>
+      </p:pic>
+      <p:pic>
+        <p:nvPicPr>
+          <p:cNvPr id="5" name="Picture 4" descr="A screenshot of a computer&#10;&#10;AI-generated content may be incorrect.">
+            <a:extLst>
+              <a:ext uri="{FF2B5EF4-FFF2-40B4-BE49-F238E27FC236}">
+                <a16:creationId xmlns:a16="http://schemas.microsoft.com/office/drawing/2014/main" id="{C236BBD6-7492-FD12-D23F-811769D60D3C}"/>
+              </a:ext>
+            </a:extLst>
+          </p:cNvPr>
+          <p:cNvPicPr>
+            <a:picLocks noChangeAspect="1"/>
+          </p:cNvPicPr>
+          <p:nvPr/>
+        </p:nvPicPr>
+        <p:blipFill>
+          <a:blip r:embed="rId3"/>
+          <a:stretch>
+            <a:fillRect/>
+          </a:stretch>
+        </p:blipFill>
+        <p:spPr>
+          <a:xfrm>
+            <a:off x="4965263" y="-4918"/>
+            <a:ext cx="7468644" cy="6858000"/>
+          </a:xfrm>
+          <a:prstGeom prst="rect">
+            <a:avLst/>
+          </a:prstGeom>
+        </p:spPr>
+      </p:pic>
+    </p:spTree>
+    <p:extLst>
+      <p:ext uri="{BB962C8B-B14F-4D97-AF65-F5344CB8AC3E}">
+        <p14:creationId xmlns:p14="http://schemas.microsoft.com/office/powerpoint/2010/main" val="1799615190"/>
       </p:ext>
     </p:extLst>
   </p:cSld>

--- a/slides/06-d3.pptx
+++ b/slides/06-d3.pptx
@@ -220,7 +220,7 @@
           <a:p>
             <a:fld id="{2CD22518-F7FE-2E40-9C60-793856882CE6}" type="datetimeFigureOut">
               <a:rPr lang="en-US" smtClean="0"/>
-              <a:t>1/12/26</a:t>
+              <a:t>2/17/26</a:t>
             </a:fld>
             <a:endParaRPr lang="en-US"/>
           </a:p>
@@ -740,7 +740,7 @@
             <a:fld id="{B61BEF0D-F0BB-DE4B-95CE-6DB70DBA9567}" type="datetimeFigureOut">
               <a:rPr lang="en-US" smtClean="0"/>
               <a:pPr/>
-              <a:t>1/12/26</a:t>
+              <a:t>2/17/26</a:t>
             </a:fld>
             <a:endParaRPr lang="en-US" dirty="0"/>
           </a:p>
@@ -1004,7 +1004,7 @@
             <a:fld id="{B61BEF0D-F0BB-DE4B-95CE-6DB70DBA9567}" type="datetimeFigureOut">
               <a:rPr lang="en-US" smtClean="0"/>
               <a:pPr/>
-              <a:t>1/12/26</a:t>
+              <a:t>2/17/26</a:t>
             </a:fld>
             <a:endParaRPr lang="en-US" dirty="0"/>
           </a:p>
@@ -1241,7 +1241,7 @@
             <a:fld id="{B61BEF0D-F0BB-DE4B-95CE-6DB70DBA9567}" type="datetimeFigureOut">
               <a:rPr lang="en-US" smtClean="0"/>
               <a:pPr/>
-              <a:t>1/12/26</a:t>
+              <a:t>2/17/26</a:t>
             </a:fld>
             <a:endParaRPr lang="en-US" dirty="0"/>
           </a:p>
@@ -1490,7 +1490,7 @@
             <a:fld id="{B61BEF0D-F0BB-DE4B-95CE-6DB70DBA9567}" type="datetimeFigureOut">
               <a:rPr lang="en-US" smtClean="0"/>
               <a:pPr/>
-              <a:t>1/12/26</a:t>
+              <a:t>2/17/26</a:t>
             </a:fld>
             <a:endParaRPr lang="en-US" dirty="0"/>
           </a:p>
@@ -1799,7 +1799,7 @@
             <a:fld id="{B61BEF0D-F0BB-DE4B-95CE-6DB70DBA9567}" type="datetimeFigureOut">
               <a:rPr lang="en-US" smtClean="0"/>
               <a:pPr/>
-              <a:t>1/12/26</a:t>
+              <a:t>2/17/26</a:t>
             </a:fld>
             <a:endParaRPr lang="en-US" dirty="0"/>
           </a:p>
@@ -2103,7 +2103,7 @@
             <a:fld id="{B61BEF0D-F0BB-DE4B-95CE-6DB70DBA9567}" type="datetimeFigureOut">
               <a:rPr lang="en-US" smtClean="0"/>
               <a:pPr/>
-              <a:t>1/12/26</a:t>
+              <a:t>2/17/26</a:t>
             </a:fld>
             <a:endParaRPr lang="en-US" dirty="0"/>
           </a:p>
@@ -2527,7 +2527,7 @@
             <a:fld id="{B61BEF0D-F0BB-DE4B-95CE-6DB70DBA9567}" type="datetimeFigureOut">
               <a:rPr lang="en-US" smtClean="0"/>
               <a:pPr/>
-              <a:t>1/12/26</a:t>
+              <a:t>2/17/26</a:t>
             </a:fld>
             <a:endParaRPr lang="en-US" dirty="0"/>
           </a:p>
@@ -2624,7 +2624,7 @@
             <a:fld id="{B61BEF0D-F0BB-DE4B-95CE-6DB70DBA9567}" type="datetimeFigureOut">
               <a:rPr lang="en-US" smtClean="0"/>
               <a:pPr/>
-              <a:t>1/12/26</a:t>
+              <a:t>2/17/26</a:t>
             </a:fld>
             <a:endParaRPr lang="en-US" dirty="0"/>
           </a:p>
@@ -2788,7 +2788,7 @@
             <a:fld id="{B61BEF0D-F0BB-DE4B-95CE-6DB70DBA9567}" type="datetimeFigureOut">
               <a:rPr lang="en-US" smtClean="0"/>
               <a:pPr/>
-              <a:t>1/12/26</a:t>
+              <a:t>2/17/26</a:t>
             </a:fld>
             <a:endParaRPr lang="en-US" dirty="0"/>
           </a:p>
@@ -3168,7 +3168,7 @@
             <a:fld id="{B61BEF0D-F0BB-DE4B-95CE-6DB70DBA9567}" type="datetimeFigureOut">
               <a:rPr lang="en-US" smtClean="0"/>
               <a:pPr/>
-              <a:t>1/12/26</a:t>
+              <a:t>2/17/26</a:t>
             </a:fld>
             <a:endParaRPr lang="en-US" dirty="0"/>
           </a:p>
@@ -3459,7 +3459,7 @@
             <a:fld id="{B61BEF0D-F0BB-DE4B-95CE-6DB70DBA9567}" type="datetimeFigureOut">
               <a:rPr lang="en-US" smtClean="0"/>
               <a:pPr/>
-              <a:t>1/12/26</a:t>
+              <a:t>2/17/26</a:t>
             </a:fld>
             <a:endParaRPr lang="en-US" dirty="0"/>
           </a:p>
@@ -3672,7 +3672,7 @@
             <a:fld id="{B61BEF0D-F0BB-DE4B-95CE-6DB70DBA9567}" type="datetimeFigureOut">
               <a:rPr lang="en-US" smtClean="0"/>
               <a:pPr/>
-              <a:t>1/12/26</a:t>
+              <a:t>2/17/26</a:t>
             </a:fld>
             <a:endParaRPr lang="en-US" dirty="0"/>
           </a:p>
@@ -6666,15 +6666,7 @@
             <a:pPr lvl="1"/>
             <a:r>
               <a:rPr lang="en-US" sz="2200" dirty="0"/>
-              <a:t>return a value (such as a coordinate, a </a:t>
-            </a:r>
-            <a:r>
-              <a:rPr lang="en-US" sz="2200" dirty="0" err="1"/>
-              <a:t>colour</a:t>
-            </a:r>
-            <a:r>
-              <a:rPr lang="en-US" sz="2200" dirty="0"/>
-              <a:t>, a length or a radius)</a:t>
+              <a:t>return a value (such as a coordinate, a color, a length, or a radius)</a:t>
             </a:r>
           </a:p>
           <a:p>
@@ -8139,7 +8131,7 @@
               <a:rPr lang="en-US" sz="2400" dirty="0">
                 <a:sym typeface="Wingdings" pitchFamily="2" charset="2"/>
               </a:rPr>
-              <a:t>D3 includes build in functions to bind data with HTML SVG elements </a:t>
+              <a:t>D3 includes built in functions to bind data with HTML SVG elements </a:t>
             </a:r>
           </a:p>
           <a:p>
